--- a/chapter6/chapter6.pptx
+++ b/chapter6/chapter6.pptx
@@ -10504,10 +10504,12 @@
           </a:bodyPr>
           <a:lstStyle/>
           <a:p>
-            <a:pPr>
+            <a:pPr lvl="0" marL="457200" indent="-228600">
+              <a:buFont typeface="Calibri"/>
               <a:spcAft>
                 <a:spcPts val="1000"/>
               </a:spcAft>
+              <a:buSzPct val="100000"/>
               <a:buChar char="•"/>
               <a:lnSpc>
                 <a:spcPts val="2200"/>
@@ -10524,10 +10526,12 @@
             </a:r>
           </a:p>
           <a:p>
-            <a:pPr>
+            <a:pPr lvl="0" marL="457200" indent="-228600">
+              <a:buFont typeface="Calibri"/>
               <a:spcAft>
                 <a:spcPts val="1000"/>
               </a:spcAft>
+              <a:buSzPct val="100000"/>
               <a:buChar char="•"/>
               <a:lnSpc>
                 <a:spcPts val="2200"/>
@@ -10544,10 +10548,12 @@
             </a:r>
           </a:p>
           <a:p>
-            <a:pPr>
+            <a:pPr lvl="0" marL="457200" indent="-228600">
+              <a:buFont typeface="Calibri"/>
               <a:spcAft>
                 <a:spcPts val="1000"/>
               </a:spcAft>
+              <a:buSzPct val="100000"/>
               <a:buChar char="•"/>
               <a:lnSpc>
                 <a:spcPts val="2200"/>
@@ -10683,10 +10689,12 @@
           </a:bodyPr>
           <a:lstStyle/>
           <a:p>
-            <a:pPr>
+            <a:pPr lvl="0" marL="457200" indent="-228600">
+              <a:buFont typeface="Calibri"/>
               <a:spcAft>
                 <a:spcPts val="1000"/>
               </a:spcAft>
+              <a:buSzPct val="100000"/>
               <a:buChar char="•"/>
               <a:lnSpc>
                 <a:spcPts val="2200"/>
@@ -10703,10 +10711,12 @@
             </a:r>
           </a:p>
           <a:p>
-            <a:pPr>
+            <a:pPr lvl="0" marL="457200" indent="-228600">
+              <a:buFont typeface="Calibri"/>
               <a:spcAft>
                 <a:spcPts val="1000"/>
               </a:spcAft>
+              <a:buSzPct val="100000"/>
               <a:buChar char="•"/>
               <a:lnSpc>
                 <a:spcPts val="2200"/>
@@ -10723,10 +10733,12 @@
             </a:r>
           </a:p>
           <a:p>
-            <a:pPr>
+            <a:pPr lvl="0" marL="457200" indent="-228600">
+              <a:buFont typeface="Calibri"/>
               <a:spcAft>
                 <a:spcPts val="1000"/>
               </a:spcAft>
+              <a:buSzPct val="100000"/>
               <a:buChar char="•"/>
               <a:lnSpc>
                 <a:spcPts val="2200"/>
@@ -10743,10 +10755,12 @@
             </a:r>
           </a:p>
           <a:p>
-            <a:pPr>
+            <a:pPr lvl="0" marL="457200" indent="-228600">
+              <a:buFont typeface="Calibri"/>
               <a:spcAft>
                 <a:spcPts val="1000"/>
               </a:spcAft>
+              <a:buSzPct val="100000"/>
               <a:buChar char="•"/>
               <a:lnSpc>
                 <a:spcPts val="2200"/>
@@ -10882,10 +10896,12 @@
           </a:bodyPr>
           <a:lstStyle/>
           <a:p>
-            <a:pPr>
+            <a:pPr lvl="0" marL="457200" indent="-228600">
+              <a:buFont typeface="Calibri"/>
               <a:spcAft>
                 <a:spcPts val="1000"/>
               </a:spcAft>
+              <a:buSzPct val="100000"/>
               <a:buChar char="•"/>
               <a:lnSpc>
                 <a:spcPts val="2200"/>
@@ -10902,10 +10918,12 @@
             </a:r>
           </a:p>
           <a:p>
-            <a:pPr>
+            <a:pPr lvl="0" marL="457200" indent="-228600">
+              <a:buFont typeface="Calibri"/>
               <a:spcAft>
                 <a:spcPts val="1000"/>
               </a:spcAft>
+              <a:buSzPct val="100000"/>
               <a:buChar char="•"/>
               <a:lnSpc>
                 <a:spcPts val="2200"/>
@@ -10922,10 +10940,12 @@
             </a:r>
           </a:p>
           <a:p>
-            <a:pPr>
+            <a:pPr lvl="0" marL="457200" indent="-228600">
+              <a:buFont typeface="Calibri"/>
               <a:spcAft>
                 <a:spcPts val="1000"/>
               </a:spcAft>
+              <a:buSzPct val="100000"/>
               <a:buChar char="•"/>
               <a:lnSpc>
                 <a:spcPts val="2200"/>
@@ -10942,10 +10962,12 @@
             </a:r>
           </a:p>
           <a:p>
-            <a:pPr>
+            <a:pPr lvl="0" marL="457200" indent="-228600">
+              <a:buFont typeface="Calibri"/>
               <a:spcAft>
                 <a:spcPts val="1000"/>
               </a:spcAft>
+              <a:buSzPct val="100000"/>
               <a:buChar char="•"/>
               <a:lnSpc>
                 <a:spcPts val="2200"/>
@@ -10962,10 +10984,12 @@
             </a:r>
           </a:p>
           <a:p>
-            <a:pPr>
+            <a:pPr lvl="0" marL="457200" indent="-228600">
+              <a:buFont typeface="Calibri"/>
               <a:spcAft>
                 <a:spcPts val="1000"/>
               </a:spcAft>
+              <a:buSzPct val="100000"/>
               <a:buChar char="•"/>
               <a:lnSpc>
                 <a:spcPts val="2200"/>
@@ -11101,10 +11125,12 @@
           </a:bodyPr>
           <a:lstStyle/>
           <a:p>
-            <a:pPr>
+            <a:pPr lvl="0" marL="457200" indent="-228600">
+              <a:buFont typeface="Calibri"/>
               <a:spcAft>
                 <a:spcPts val="1000"/>
               </a:spcAft>
+              <a:buSzPct val="100000"/>
               <a:buChar char="•"/>
               <a:lnSpc>
                 <a:spcPts val="2200"/>
@@ -11121,10 +11147,12 @@
             </a:r>
           </a:p>
           <a:p>
-            <a:pPr>
+            <a:pPr lvl="0" marL="457200" indent="-228600">
+              <a:buFont typeface="Calibri"/>
               <a:spcAft>
                 <a:spcPts val="1000"/>
               </a:spcAft>
+              <a:buSzPct val="100000"/>
               <a:buChar char="•"/>
               <a:lnSpc>
                 <a:spcPts val="2200"/>
@@ -11141,10 +11169,12 @@
             </a:r>
           </a:p>
           <a:p>
-            <a:pPr>
+            <a:pPr lvl="0" marL="457200" indent="-228600">
+              <a:buFont typeface="Calibri"/>
               <a:spcAft>
                 <a:spcPts val="1000"/>
               </a:spcAft>
+              <a:buSzPct val="100000"/>
               <a:buChar char="•"/>
               <a:lnSpc>
                 <a:spcPts val="2200"/>
@@ -11280,10 +11310,12 @@
           </a:bodyPr>
           <a:lstStyle/>
           <a:p>
-            <a:pPr>
+            <a:pPr lvl="0" marL="457200" indent="-228600">
+              <a:buFont typeface="Calibri"/>
               <a:spcAft>
                 <a:spcPts val="1000"/>
               </a:spcAft>
+              <a:buSzPct val="100000"/>
               <a:buChar char="•"/>
               <a:lnSpc>
                 <a:spcPts val="2200"/>
@@ -11300,10 +11332,12 @@
             </a:r>
           </a:p>
           <a:p>
-            <a:pPr>
+            <a:pPr lvl="0" marL="457200" indent="-228600">
+              <a:buFont typeface="Calibri"/>
               <a:spcAft>
                 <a:spcPts val="1000"/>
               </a:spcAft>
+              <a:buSzPct val="100000"/>
               <a:buChar char="•"/>
               <a:lnSpc>
                 <a:spcPts val="2200"/>
@@ -11320,10 +11354,12 @@
             </a:r>
           </a:p>
           <a:p>
-            <a:pPr>
+            <a:pPr lvl="0" marL="457200" indent="-228600">
+              <a:buFont typeface="Calibri"/>
               <a:spcAft>
                 <a:spcPts val="1000"/>
               </a:spcAft>
+              <a:buSzPct val="100000"/>
               <a:buChar char="•"/>
               <a:lnSpc>
                 <a:spcPts val="2200"/>
@@ -11459,10 +11495,12 @@
           </a:bodyPr>
           <a:lstStyle/>
           <a:p>
-            <a:pPr>
+            <a:pPr lvl="0" marL="457200" indent="-228600">
+              <a:buFont typeface="Calibri"/>
               <a:spcAft>
                 <a:spcPts val="1000"/>
               </a:spcAft>
+              <a:buSzPct val="100000"/>
               <a:buChar char="•"/>
               <a:lnSpc>
                 <a:spcPts val="2200"/>
@@ -11479,10 +11517,12 @@
             </a:r>
           </a:p>
           <a:p>
-            <a:pPr>
+            <a:pPr lvl="0" marL="457200" indent="-228600">
+              <a:buFont typeface="Calibri"/>
               <a:spcAft>
                 <a:spcPts val="1000"/>
               </a:spcAft>
+              <a:buSzPct val="100000"/>
               <a:buChar char="•"/>
               <a:lnSpc>
                 <a:spcPts val="2200"/>
@@ -11499,10 +11539,12 @@
             </a:r>
           </a:p>
           <a:p>
-            <a:pPr>
+            <a:pPr lvl="0" marL="457200" indent="-228600">
+              <a:buFont typeface="Calibri"/>
               <a:spcAft>
                 <a:spcPts val="1000"/>
               </a:spcAft>
+              <a:buSzPct val="100000"/>
               <a:buChar char="•"/>
               <a:lnSpc>
                 <a:spcPts val="2200"/>
@@ -11638,10 +11680,12 @@
           </a:bodyPr>
           <a:lstStyle/>
           <a:p>
-            <a:pPr>
+            <a:pPr lvl="0" marL="457200" indent="-228600">
+              <a:buFont typeface="Calibri"/>
               <a:spcAft>
                 <a:spcPts val="1000"/>
               </a:spcAft>
+              <a:buSzPct val="100000"/>
               <a:buChar char="•"/>
               <a:lnSpc>
                 <a:spcPts val="2200"/>
@@ -11658,10 +11702,12 @@
             </a:r>
           </a:p>
           <a:p>
-            <a:pPr>
+            <a:pPr lvl="0" marL="457200" indent="-228600">
+              <a:buFont typeface="Calibri"/>
               <a:spcAft>
                 <a:spcPts val="1000"/>
               </a:spcAft>
+              <a:buSzPct val="100000"/>
               <a:buChar char="•"/>
               <a:lnSpc>
                 <a:spcPts val="2200"/>
@@ -11797,10 +11843,12 @@
           </a:bodyPr>
           <a:lstStyle/>
           <a:p>
-            <a:pPr>
+            <a:pPr lvl="0" marL="457200" indent="-228600">
+              <a:buFont typeface="Calibri"/>
               <a:spcAft>
                 <a:spcPts val="1000"/>
               </a:spcAft>
+              <a:buSzPct val="100000"/>
               <a:buChar char="•"/>
               <a:lnSpc>
                 <a:spcPts val="2200"/>
@@ -11817,10 +11865,12 @@
             </a:r>
           </a:p>
           <a:p>
-            <a:pPr>
+            <a:pPr lvl="0" marL="457200" indent="-228600">
+              <a:buFont typeface="Calibri"/>
               <a:spcAft>
                 <a:spcPts val="1000"/>
               </a:spcAft>
+              <a:buSzPct val="100000"/>
               <a:buChar char="•"/>
               <a:lnSpc>
                 <a:spcPts val="2200"/>
@@ -11837,10 +11887,12 @@
             </a:r>
           </a:p>
           <a:p>
-            <a:pPr>
+            <a:pPr lvl="0" marL="457200" indent="-228600">
+              <a:buFont typeface="Calibri"/>
               <a:spcAft>
                 <a:spcPts val="1000"/>
               </a:spcAft>
+              <a:buSzPct val="100000"/>
               <a:buChar char="•"/>
               <a:lnSpc>
                 <a:spcPts val="2200"/>
@@ -11976,10 +12028,12 @@
           </a:bodyPr>
           <a:lstStyle/>
           <a:p>
-            <a:pPr>
+            <a:pPr lvl="0" marL="457200" indent="-228600">
+              <a:buFont typeface="Calibri"/>
               <a:spcAft>
                 <a:spcPts val="1000"/>
               </a:spcAft>
+              <a:buSzPct val="100000"/>
               <a:buChar char="•"/>
               <a:lnSpc>
                 <a:spcPts val="2200"/>
@@ -11996,10 +12050,12 @@
             </a:r>
           </a:p>
           <a:p>
-            <a:pPr>
+            <a:pPr lvl="0" marL="457200" indent="-228600">
+              <a:buFont typeface="Calibri"/>
               <a:spcAft>
                 <a:spcPts val="1000"/>
               </a:spcAft>
+              <a:buSzPct val="100000"/>
               <a:buChar char="•"/>
               <a:lnSpc>
                 <a:spcPts val="2200"/>
@@ -12135,10 +12191,12 @@
           </a:bodyPr>
           <a:lstStyle/>
           <a:p>
-            <a:pPr>
+            <a:pPr lvl="0" marL="457200" indent="-228600">
+              <a:buFont typeface="Calibri"/>
               <a:spcAft>
                 <a:spcPts val="1000"/>
               </a:spcAft>
+              <a:buSzPct val="100000"/>
               <a:buChar char="•"/>
               <a:lnSpc>
                 <a:spcPts val="2200"/>
@@ -12155,10 +12213,12 @@
             </a:r>
           </a:p>
           <a:p>
-            <a:pPr>
+            <a:pPr lvl="0" marL="457200" indent="-228600">
+              <a:buFont typeface="Calibri"/>
               <a:spcAft>
                 <a:spcPts val="1000"/>
               </a:spcAft>
+              <a:buSzPct val="100000"/>
               <a:buChar char="•"/>
               <a:lnSpc>
                 <a:spcPts val="2200"/>
@@ -12294,10 +12354,12 @@
           </a:bodyPr>
           <a:lstStyle/>
           <a:p>
-            <a:pPr>
+            <a:pPr lvl="0" marL="457200" indent="-228600">
+              <a:buFont typeface="Calibri"/>
               <a:spcAft>
                 <a:spcPts val="1000"/>
               </a:spcAft>
+              <a:buSzPct val="100000"/>
               <a:buChar char="•"/>
               <a:lnSpc>
                 <a:spcPts val="2200"/>
@@ -12314,10 +12376,12 @@
             </a:r>
           </a:p>
           <a:p>
-            <a:pPr>
+            <a:pPr lvl="0" marL="457200" indent="-228600">
+              <a:buFont typeface="Calibri"/>
               <a:spcAft>
                 <a:spcPts val="1000"/>
               </a:spcAft>
+              <a:buSzPct val="100000"/>
               <a:buChar char="•"/>
               <a:lnSpc>
                 <a:spcPts val="2200"/>
@@ -12453,10 +12517,12 @@
           </a:bodyPr>
           <a:lstStyle/>
           <a:p>
-            <a:pPr>
+            <a:pPr lvl="0" marL="457200" indent="-228600">
+              <a:buFont typeface="Calibri"/>
               <a:spcAft>
                 <a:spcPts val="1000"/>
               </a:spcAft>
+              <a:buSzPct val="100000"/>
               <a:buChar char="•"/>
               <a:lnSpc>
                 <a:spcPts val="2200"/>
@@ -12473,10 +12539,12 @@
             </a:r>
           </a:p>
           <a:p>
-            <a:pPr>
+            <a:pPr lvl="0" marL="457200" indent="-228600">
+              <a:buFont typeface="Calibri"/>
               <a:spcAft>
                 <a:spcPts val="1000"/>
               </a:spcAft>
+              <a:buSzPct val="100000"/>
               <a:buChar char="•"/>
               <a:lnSpc>
                 <a:spcPts val="2200"/>
@@ -12493,10 +12561,12 @@
             </a:r>
           </a:p>
           <a:p>
-            <a:pPr>
+            <a:pPr lvl="0" marL="457200" indent="-228600">
+              <a:buFont typeface="Calibri"/>
               <a:spcAft>
                 <a:spcPts val="1000"/>
               </a:spcAft>
+              <a:buSzPct val="100000"/>
               <a:buChar char="•"/>
               <a:lnSpc>
                 <a:spcPts val="2200"/>
@@ -12632,10 +12702,12 @@
           </a:bodyPr>
           <a:lstStyle/>
           <a:p>
-            <a:pPr>
+            <a:pPr lvl="0" marL="457200" indent="-228600">
+              <a:buFont typeface="Calibri"/>
               <a:spcAft>
                 <a:spcPts val="1000"/>
               </a:spcAft>
+              <a:buSzPct val="100000"/>
               <a:buChar char="•"/>
               <a:lnSpc>
                 <a:spcPts val="2200"/>
@@ -12652,10 +12724,12 @@
             </a:r>
           </a:p>
           <a:p>
-            <a:pPr>
+            <a:pPr lvl="0" marL="457200" indent="-228600">
+              <a:buFont typeface="Calibri"/>
               <a:spcAft>
                 <a:spcPts val="1000"/>
               </a:spcAft>
+              <a:buSzPct val="100000"/>
               <a:buChar char="•"/>
               <a:lnSpc>
                 <a:spcPts val="2200"/>
@@ -12672,10 +12746,12 @@
             </a:r>
           </a:p>
           <a:p>
-            <a:pPr>
+            <a:pPr lvl="0" marL="457200" indent="-228600">
+              <a:buFont typeface="Calibri"/>
               <a:spcAft>
                 <a:spcPts val="1000"/>
               </a:spcAft>
+              <a:buSzPct val="100000"/>
               <a:buChar char="•"/>
               <a:lnSpc>
                 <a:spcPts val="2200"/>
@@ -12692,10 +12768,12 @@
             </a:r>
           </a:p>
           <a:p>
-            <a:pPr>
+            <a:pPr lvl="0" marL="457200" indent="-228600">
+              <a:buFont typeface="Calibri"/>
               <a:spcAft>
                 <a:spcPts val="1000"/>
               </a:spcAft>
+              <a:buSzPct val="100000"/>
               <a:buChar char="•"/>
               <a:lnSpc>
                 <a:spcPts val="2200"/>
@@ -13275,10 +13353,12 @@
           </a:bodyPr>
           <a:lstStyle/>
           <a:p>
-            <a:pPr>
+            <a:pPr lvl="0" marL="457200" indent="-228600">
+              <a:buFont typeface="Calibri"/>
               <a:spcAft>
                 <a:spcPts val="1000"/>
               </a:spcAft>
+              <a:buSzPct val="100000"/>
               <a:buChar char="•"/>
               <a:lnSpc>
                 <a:spcPts val="2200"/>
@@ -13295,10 +13375,12 @@
             </a:r>
           </a:p>
           <a:p>
-            <a:pPr>
+            <a:pPr lvl="0" marL="457200" indent="-228600">
+              <a:buFont typeface="Calibri"/>
               <a:spcAft>
                 <a:spcPts val="1000"/>
               </a:spcAft>
+              <a:buSzPct val="100000"/>
               <a:buChar char="•"/>
               <a:lnSpc>
                 <a:spcPts val="2200"/>
@@ -13315,10 +13397,12 @@
             </a:r>
           </a:p>
           <a:p>
-            <a:pPr>
+            <a:pPr lvl="0" marL="457200" indent="-228600">
+              <a:buFont typeface="Calibri"/>
               <a:spcAft>
                 <a:spcPts val="1000"/>
               </a:spcAft>
+              <a:buSzPct val="100000"/>
               <a:buChar char="•"/>
               <a:lnSpc>
                 <a:spcPts val="2200"/>
@@ -13454,10 +13538,12 @@
           </a:bodyPr>
           <a:lstStyle/>
           <a:p>
-            <a:pPr>
+            <a:pPr lvl="0" marL="457200" indent="-228600">
+              <a:buFont typeface="Calibri"/>
               <a:spcAft>
                 <a:spcPts val="1000"/>
               </a:spcAft>
+              <a:buSzPct val="100000"/>
               <a:buChar char="•"/>
               <a:lnSpc>
                 <a:spcPts val="2200"/>
@@ -13474,10 +13560,12 @@
             </a:r>
           </a:p>
           <a:p>
-            <a:pPr>
+            <a:pPr lvl="0" marL="457200" indent="-228600">
+              <a:buFont typeface="Calibri"/>
               <a:spcAft>
                 <a:spcPts val="1000"/>
               </a:spcAft>
+              <a:buSzPct val="100000"/>
               <a:buChar char="•"/>
               <a:lnSpc>
                 <a:spcPts val="2200"/>
@@ -13494,10 +13582,12 @@
             </a:r>
           </a:p>
           <a:p>
-            <a:pPr>
+            <a:pPr lvl="0" marL="457200" indent="-228600">
+              <a:buFont typeface="Calibri"/>
               <a:spcAft>
                 <a:spcPts val="1000"/>
               </a:spcAft>
+              <a:buSzPct val="100000"/>
               <a:buChar char="•"/>
               <a:lnSpc>
                 <a:spcPts val="2200"/>
@@ -13633,10 +13723,12 @@
           </a:bodyPr>
           <a:lstStyle/>
           <a:p>
-            <a:pPr>
+            <a:pPr lvl="0" marL="457200" indent="-228600">
+              <a:buFont typeface="Calibri"/>
               <a:spcAft>
                 <a:spcPts val="1000"/>
               </a:spcAft>
+              <a:buSzPct val="100000"/>
               <a:buChar char="•"/>
               <a:lnSpc>
                 <a:spcPts val="2200"/>
@@ -13653,10 +13745,12 @@
             </a:r>
           </a:p>
           <a:p>
-            <a:pPr>
+            <a:pPr lvl="0" marL="457200" indent="-228600">
+              <a:buFont typeface="Calibri"/>
               <a:spcAft>
                 <a:spcPts val="1000"/>
               </a:spcAft>
+              <a:buSzPct val="100000"/>
               <a:buChar char="•"/>
               <a:lnSpc>
                 <a:spcPts val="2200"/>
@@ -13673,10 +13767,12 @@
             </a:r>
           </a:p>
           <a:p>
-            <a:pPr>
+            <a:pPr lvl="0" marL="457200" indent="-228600">
+              <a:buFont typeface="Calibri"/>
               <a:spcAft>
                 <a:spcPts val="1000"/>
               </a:spcAft>
+              <a:buSzPct val="100000"/>
               <a:buChar char="•"/>
               <a:lnSpc>
                 <a:spcPts val="2200"/>
@@ -13812,10 +13908,12 @@
           </a:bodyPr>
           <a:lstStyle/>
           <a:p>
-            <a:pPr>
+            <a:pPr lvl="0" marL="457200" indent="-228600">
+              <a:buFont typeface="Calibri"/>
               <a:spcAft>
                 <a:spcPts val="1000"/>
               </a:spcAft>
+              <a:buSzPct val="100000"/>
               <a:buChar char="•"/>
               <a:lnSpc>
                 <a:spcPts val="2200"/>
@@ -13832,10 +13930,12 @@
             </a:r>
           </a:p>
           <a:p>
-            <a:pPr>
+            <a:pPr lvl="0" marL="457200" indent="-228600">
+              <a:buFont typeface="Calibri"/>
               <a:spcAft>
                 <a:spcPts val="1000"/>
               </a:spcAft>
+              <a:buSzPct val="100000"/>
               <a:buChar char="•"/>
               <a:lnSpc>
                 <a:spcPts val="2200"/>
@@ -13852,10 +13952,12 @@
             </a:r>
           </a:p>
           <a:p>
-            <a:pPr>
+            <a:pPr lvl="0" marL="457200" indent="-228600">
+              <a:buFont typeface="Calibri"/>
               <a:spcAft>
                 <a:spcPts val="1000"/>
               </a:spcAft>
+              <a:buSzPct val="100000"/>
               <a:buChar char="•"/>
               <a:lnSpc>
                 <a:spcPts val="2200"/>
@@ -13991,10 +14093,12 @@
           </a:bodyPr>
           <a:lstStyle/>
           <a:p>
-            <a:pPr>
+            <a:pPr lvl="0" marL="457200" indent="-228600">
+              <a:buFont typeface="Calibri"/>
               <a:spcAft>
                 <a:spcPts val="1000"/>
               </a:spcAft>
+              <a:buSzPct val="100000"/>
               <a:buChar char="•"/>
               <a:lnSpc>
                 <a:spcPts val="2200"/>
@@ -14011,10 +14115,12 @@
             </a:r>
           </a:p>
           <a:p>
-            <a:pPr>
+            <a:pPr lvl="0" marL="457200" indent="-228600">
+              <a:buFont typeface="Calibri"/>
               <a:spcAft>
                 <a:spcPts val="1000"/>
               </a:spcAft>
+              <a:buSzPct val="100000"/>
               <a:buChar char="•"/>
               <a:lnSpc>
                 <a:spcPts val="2200"/>
@@ -14150,10 +14256,12 @@
           </a:bodyPr>
           <a:lstStyle/>
           <a:p>
-            <a:pPr>
+            <a:pPr lvl="0" marL="457200" indent="-228600">
+              <a:buFont typeface="Calibri"/>
               <a:spcAft>
                 <a:spcPts val="1000"/>
               </a:spcAft>
+              <a:buSzPct val="100000"/>
               <a:buChar char="•"/>
               <a:lnSpc>
                 <a:spcPts val="2200"/>
@@ -14170,10 +14278,12 @@
             </a:r>
           </a:p>
           <a:p>
-            <a:pPr>
+            <a:pPr lvl="0" marL="457200" indent="-228600">
+              <a:buFont typeface="Calibri"/>
               <a:spcAft>
                 <a:spcPts val="1000"/>
               </a:spcAft>
+              <a:buSzPct val="100000"/>
               <a:buChar char="•"/>
               <a:lnSpc>
                 <a:spcPts val="2200"/>
@@ -14309,10 +14419,12 @@
           </a:bodyPr>
           <a:lstStyle/>
           <a:p>
-            <a:pPr>
+            <a:pPr lvl="0" marL="457200" indent="-228600">
+              <a:buFont typeface="Calibri"/>
               <a:spcAft>
                 <a:spcPts val="1000"/>
               </a:spcAft>
+              <a:buSzPct val="100000"/>
               <a:buChar char="•"/>
               <a:lnSpc>
                 <a:spcPts val="2200"/>
@@ -14329,10 +14441,12 @@
             </a:r>
           </a:p>
           <a:p>
-            <a:pPr>
+            <a:pPr lvl="0" marL="457200" indent="-228600">
+              <a:buFont typeface="Calibri"/>
               <a:spcAft>
                 <a:spcPts val="1000"/>
               </a:spcAft>
+              <a:buSzPct val="100000"/>
               <a:buChar char="•"/>
               <a:lnSpc>
                 <a:spcPts val="2200"/>
@@ -14468,10 +14582,12 @@
           </a:bodyPr>
           <a:lstStyle/>
           <a:p>
-            <a:pPr>
+            <a:pPr lvl="0" marL="457200" indent="-228600">
+              <a:buFont typeface="Calibri"/>
               <a:spcAft>
                 <a:spcPts val="1000"/>
               </a:spcAft>
+              <a:buSzPct val="100000"/>
               <a:buChar char="•"/>
               <a:lnSpc>
                 <a:spcPts val="2200"/>
@@ -14488,10 +14604,12 @@
             </a:r>
           </a:p>
           <a:p>
-            <a:pPr>
+            <a:pPr lvl="0" marL="457200" indent="-228600">
+              <a:buFont typeface="Calibri"/>
               <a:spcAft>
                 <a:spcPts val="1000"/>
               </a:spcAft>
+              <a:buSzPct val="100000"/>
               <a:buChar char="•"/>
               <a:lnSpc>
                 <a:spcPts val="2200"/>
@@ -14508,10 +14626,12 @@
             </a:r>
           </a:p>
           <a:p>
-            <a:pPr>
+            <a:pPr lvl="0" marL="457200" indent="-228600">
+              <a:buFont typeface="Calibri"/>
               <a:spcAft>
                 <a:spcPts val="1000"/>
               </a:spcAft>
+              <a:buSzPct val="100000"/>
               <a:buChar char="•"/>
               <a:lnSpc>
                 <a:spcPts val="2200"/>
@@ -14647,10 +14767,12 @@
           </a:bodyPr>
           <a:lstStyle/>
           <a:p>
-            <a:pPr>
+            <a:pPr lvl="0" marL="457200" indent="-228600">
+              <a:buFont typeface="Calibri"/>
               <a:spcAft>
                 <a:spcPts val="1000"/>
               </a:spcAft>
+              <a:buSzPct val="100000"/>
               <a:buChar char="•"/>
               <a:lnSpc>
                 <a:spcPts val="2200"/>
@@ -14667,10 +14789,12 @@
             </a:r>
           </a:p>
           <a:p>
-            <a:pPr>
+            <a:pPr lvl="0" marL="457200" indent="-228600">
+              <a:buFont typeface="Calibri"/>
               <a:spcAft>
                 <a:spcPts val="1000"/>
               </a:spcAft>
+              <a:buSzPct val="100000"/>
               <a:buChar char="•"/>
               <a:lnSpc>
                 <a:spcPts val="2200"/>
@@ -14687,10 +14811,12 @@
             </a:r>
           </a:p>
           <a:p>
-            <a:pPr>
+            <a:pPr lvl="0" marL="457200" indent="-228600">
+              <a:buFont typeface="Calibri"/>
               <a:spcAft>
                 <a:spcPts val="1000"/>
               </a:spcAft>
+              <a:buSzPct val="100000"/>
               <a:buChar char="•"/>
               <a:lnSpc>
                 <a:spcPts val="2200"/>
@@ -14826,10 +14952,12 @@
           </a:bodyPr>
           <a:lstStyle/>
           <a:p>
-            <a:pPr>
+            <a:pPr lvl="0" marL="457200" indent="-228600">
+              <a:buFont typeface="Calibri"/>
               <a:spcAft>
                 <a:spcPts val="1000"/>
               </a:spcAft>
+              <a:buSzPct val="100000"/>
               <a:buChar char="•"/>
               <a:lnSpc>
                 <a:spcPts val="2200"/>
@@ -14846,10 +14974,12 @@
             </a:r>
           </a:p>
           <a:p>
-            <a:pPr>
+            <a:pPr lvl="0" marL="457200" indent="-228600">
+              <a:buFont typeface="Calibri"/>
               <a:spcAft>
                 <a:spcPts val="1000"/>
               </a:spcAft>
+              <a:buSzPct val="100000"/>
               <a:buChar char="•"/>
               <a:lnSpc>
                 <a:spcPts val="2200"/>
@@ -14866,10 +14996,12 @@
             </a:r>
           </a:p>
           <a:p>
-            <a:pPr>
+            <a:pPr lvl="0" marL="457200" indent="-228600">
+              <a:buFont typeface="Calibri"/>
               <a:spcAft>
                 <a:spcPts val="1000"/>
               </a:spcAft>
+              <a:buSzPct val="100000"/>
               <a:buChar char="•"/>
               <a:lnSpc>
                 <a:spcPts val="2200"/>
@@ -14886,10 +15018,12 @@
             </a:r>
           </a:p>
           <a:p>
-            <a:pPr>
+            <a:pPr lvl="0" marL="457200" indent="-228600">
+              <a:buFont typeface="Calibri"/>
               <a:spcAft>
                 <a:spcPts val="1000"/>
               </a:spcAft>
+              <a:buSzPct val="100000"/>
               <a:buChar char="•"/>
               <a:lnSpc>
                 <a:spcPts val="2200"/>
@@ -15025,10 +15159,12 @@
           </a:bodyPr>
           <a:lstStyle/>
           <a:p>
-            <a:pPr>
+            <a:pPr lvl="0" marL="457200" indent="-228600">
+              <a:buFont typeface="Calibri"/>
               <a:spcAft>
                 <a:spcPts val="1000"/>
               </a:spcAft>
+              <a:buSzPct val="100000"/>
               <a:buChar char="•"/>
               <a:lnSpc>
                 <a:spcPts val="2200"/>
@@ -15045,10 +15181,12 @@
             </a:r>
           </a:p>
           <a:p>
-            <a:pPr>
+            <a:pPr lvl="0" marL="457200" indent="-228600">
+              <a:buFont typeface="Calibri"/>
               <a:spcAft>
                 <a:spcPts val="1000"/>
               </a:spcAft>
+              <a:buSzPct val="100000"/>
               <a:buChar char="•"/>
               <a:lnSpc>
                 <a:spcPts val="2200"/>
@@ -15184,10 +15322,12 @@
           </a:bodyPr>
           <a:lstStyle/>
           <a:p>
-            <a:pPr>
+            <a:pPr lvl="0" marL="457200" indent="-228600">
+              <a:buFont typeface="Calibri"/>
               <a:spcAft>
                 <a:spcPts val="1000"/>
               </a:spcAft>
+              <a:buSzPct val="100000"/>
               <a:buChar char="•"/>
               <a:lnSpc>
                 <a:spcPts val="2200"/>
@@ -15204,10 +15344,12 @@
             </a:r>
           </a:p>
           <a:p>
-            <a:pPr>
+            <a:pPr lvl="0" marL="457200" indent="-228600">
+              <a:buFont typeface="Calibri"/>
               <a:spcAft>
                 <a:spcPts val="1000"/>
               </a:spcAft>
+              <a:buSzPct val="100000"/>
               <a:buChar char="•"/>
               <a:lnSpc>
                 <a:spcPts val="2200"/>
@@ -15343,10 +15485,12 @@
           </a:bodyPr>
           <a:lstStyle/>
           <a:p>
-            <a:pPr>
+            <a:pPr lvl="0" marL="457200" indent="-228600">
+              <a:buFont typeface="Calibri"/>
               <a:spcAft>
                 <a:spcPts val="1000"/>
               </a:spcAft>
+              <a:buSzPct val="100000"/>
               <a:buChar char="•"/>
               <a:lnSpc>
                 <a:spcPts val="2200"/>
@@ -15363,10 +15507,12 @@
             </a:r>
           </a:p>
           <a:p>
-            <a:pPr>
+            <a:pPr lvl="0" marL="457200" indent="-228600">
+              <a:buFont typeface="Calibri"/>
               <a:spcAft>
                 <a:spcPts val="1000"/>
               </a:spcAft>
+              <a:buSzPct val="100000"/>
               <a:buChar char="•"/>
               <a:lnSpc>
                 <a:spcPts val="2200"/>
@@ -15383,10 +15529,12 @@
             </a:r>
           </a:p>
           <a:p>
-            <a:pPr>
+            <a:pPr lvl="0" marL="457200" indent="-228600">
+              <a:buFont typeface="Calibri"/>
               <a:spcAft>
                 <a:spcPts val="1000"/>
               </a:spcAft>
+              <a:buSzPct val="100000"/>
               <a:buChar char="•"/>
               <a:lnSpc>
                 <a:spcPts val="2200"/>
@@ -15522,10 +15670,12 @@
           </a:bodyPr>
           <a:lstStyle/>
           <a:p>
-            <a:pPr>
+            <a:pPr lvl="0" marL="457200" indent="-228600">
+              <a:buFont typeface="Calibri"/>
               <a:spcAft>
                 <a:spcPts val="1000"/>
               </a:spcAft>
+              <a:buSzPct val="100000"/>
               <a:buChar char="•"/>
               <a:lnSpc>
                 <a:spcPts val="2200"/>
@@ -15542,10 +15692,12 @@
             </a:r>
           </a:p>
           <a:p>
-            <a:pPr>
+            <a:pPr lvl="0" marL="457200" indent="-228600">
+              <a:buFont typeface="Calibri"/>
               <a:spcAft>
                 <a:spcPts val="1000"/>
               </a:spcAft>
+              <a:buSzPct val="100000"/>
               <a:buChar char="•"/>
               <a:lnSpc>
                 <a:spcPts val="2200"/>
@@ -15681,10 +15833,12 @@
           </a:bodyPr>
           <a:lstStyle/>
           <a:p>
-            <a:pPr>
+            <a:pPr lvl="0" marL="457200" indent="-228600">
+              <a:buFont typeface="Calibri"/>
               <a:spcAft>
                 <a:spcPts val="1000"/>
               </a:spcAft>
+              <a:buSzPct val="100000"/>
               <a:buChar char="•"/>
               <a:lnSpc>
                 <a:spcPts val="2200"/>
@@ -15701,10 +15855,12 @@
             </a:r>
           </a:p>
           <a:p>
-            <a:pPr>
+            <a:pPr lvl="0" marL="457200" indent="-228600">
+              <a:buFont typeface="Calibri"/>
               <a:spcAft>
                 <a:spcPts val="1000"/>
               </a:spcAft>
+              <a:buSzPct val="100000"/>
               <a:buChar char="•"/>
               <a:lnSpc>
                 <a:spcPts val="2200"/>
@@ -15840,10 +15996,12 @@
           </a:bodyPr>
           <a:lstStyle/>
           <a:p>
-            <a:pPr>
+            <a:pPr lvl="0" marL="457200" indent="-228600">
+              <a:buFont typeface="Calibri"/>
               <a:spcAft>
                 <a:spcPts val="1000"/>
               </a:spcAft>
+              <a:buSzPct val="100000"/>
               <a:buChar char="•"/>
               <a:lnSpc>
                 <a:spcPts val="2200"/>
@@ -15860,10 +16018,12 @@
             </a:r>
           </a:p>
           <a:p>
-            <a:pPr>
+            <a:pPr lvl="0" marL="457200" indent="-228600">
+              <a:buFont typeface="Calibri"/>
               <a:spcAft>
                 <a:spcPts val="1000"/>
               </a:spcAft>
+              <a:buSzPct val="100000"/>
               <a:buChar char="•"/>
               <a:lnSpc>
                 <a:spcPts val="2200"/>
@@ -15999,10 +16159,12 @@
           </a:bodyPr>
           <a:lstStyle/>
           <a:p>
-            <a:pPr>
+            <a:pPr lvl="0" marL="457200" indent="-228600">
+              <a:buFont typeface="Calibri"/>
               <a:spcAft>
                 <a:spcPts val="1000"/>
               </a:spcAft>
+              <a:buSzPct val="100000"/>
               <a:buChar char="•"/>
               <a:lnSpc>
                 <a:spcPts val="2200"/>
@@ -16019,10 +16181,12 @@
             </a:r>
           </a:p>
           <a:p>
-            <a:pPr>
+            <a:pPr lvl="0" marL="457200" indent="-228600">
+              <a:buFont typeface="Calibri"/>
               <a:spcAft>
                 <a:spcPts val="1000"/>
               </a:spcAft>
+              <a:buSzPct val="100000"/>
               <a:buChar char="•"/>
               <a:lnSpc>
                 <a:spcPts val="2200"/>
@@ -16158,10 +16322,12 @@
           </a:bodyPr>
           <a:lstStyle/>
           <a:p>
-            <a:pPr>
+            <a:pPr lvl="0" marL="457200" indent="-228600">
+              <a:buFont typeface="Calibri"/>
               <a:spcAft>
                 <a:spcPts val="1000"/>
               </a:spcAft>
+              <a:buSzPct val="100000"/>
               <a:buChar char="•"/>
               <a:lnSpc>
                 <a:spcPts val="2200"/>
@@ -16178,10 +16344,12 @@
             </a:r>
           </a:p>
           <a:p>
-            <a:pPr>
+            <a:pPr lvl="0" marL="457200" indent="-228600">
+              <a:buFont typeface="Calibri"/>
               <a:spcAft>
                 <a:spcPts val="1000"/>
               </a:spcAft>
+              <a:buSzPct val="100000"/>
               <a:buChar char="•"/>
               <a:lnSpc>
                 <a:spcPts val="2200"/>
@@ -16198,10 +16366,12 @@
             </a:r>
           </a:p>
           <a:p>
-            <a:pPr>
+            <a:pPr lvl="0" marL="457200" indent="-228600">
+              <a:buFont typeface="Calibri"/>
               <a:spcAft>
                 <a:spcPts val="1000"/>
               </a:spcAft>
+              <a:buSzPct val="100000"/>
               <a:buChar char="•"/>
               <a:lnSpc>
                 <a:spcPts val="2200"/>
@@ -16337,10 +16507,12 @@
           </a:bodyPr>
           <a:lstStyle/>
           <a:p>
-            <a:pPr>
+            <a:pPr lvl="0" marL="457200" indent="-228600">
+              <a:buFont typeface="Calibri"/>
               <a:spcAft>
                 <a:spcPts val="1000"/>
               </a:spcAft>
+              <a:buSzPct val="100000"/>
               <a:buChar char="•"/>
               <a:lnSpc>
                 <a:spcPts val="2200"/>
@@ -16357,10 +16529,12 @@
             </a:r>
           </a:p>
           <a:p>
-            <a:pPr>
+            <a:pPr lvl="0" marL="457200" indent="-228600">
+              <a:buFont typeface="Calibri"/>
               <a:spcAft>
                 <a:spcPts val="1000"/>
               </a:spcAft>
+              <a:buSzPct val="100000"/>
               <a:buChar char="•"/>
               <a:lnSpc>
                 <a:spcPts val="2200"/>
@@ -16496,10 +16670,12 @@
           </a:bodyPr>
           <a:lstStyle/>
           <a:p>
-            <a:pPr>
+            <a:pPr lvl="0" marL="457200" indent="-228600">
+              <a:buFont typeface="Calibri"/>
               <a:spcAft>
                 <a:spcPts val="1000"/>
               </a:spcAft>
+              <a:buSzPct val="100000"/>
               <a:buChar char="•"/>
               <a:lnSpc>
                 <a:spcPts val="2200"/>
@@ -16516,10 +16692,12 @@
             </a:r>
           </a:p>
           <a:p>
-            <a:pPr>
+            <a:pPr lvl="0" marL="457200" indent="-228600">
+              <a:buFont typeface="Calibri"/>
               <a:spcAft>
                 <a:spcPts val="1000"/>
               </a:spcAft>
+              <a:buSzPct val="100000"/>
               <a:buChar char="•"/>
               <a:lnSpc>
                 <a:spcPts val="2200"/>
@@ -16655,10 +16833,12 @@
           </a:bodyPr>
           <a:lstStyle/>
           <a:p>
-            <a:pPr>
+            <a:pPr lvl="0" marL="457200" indent="-228600">
+              <a:buFont typeface="Calibri"/>
               <a:spcAft>
                 <a:spcPts val="1000"/>
               </a:spcAft>
+              <a:buSzPct val="100000"/>
               <a:buChar char="•"/>
               <a:lnSpc>
                 <a:spcPts val="2200"/>
@@ -16675,10 +16855,12 @@
             </a:r>
           </a:p>
           <a:p>
-            <a:pPr>
+            <a:pPr lvl="0" marL="457200" indent="-228600">
+              <a:buFont typeface="Calibri"/>
               <a:spcAft>
                 <a:spcPts val="1000"/>
               </a:spcAft>
+              <a:buSzPct val="100000"/>
               <a:buChar char="•"/>
               <a:lnSpc>
                 <a:spcPts val="2200"/>
@@ -16695,10 +16877,12 @@
             </a:r>
           </a:p>
           <a:p>
-            <a:pPr>
+            <a:pPr lvl="0" marL="457200" indent="-228600">
+              <a:buFont typeface="Calibri"/>
               <a:spcAft>
                 <a:spcPts val="1000"/>
               </a:spcAft>
+              <a:buSzPct val="100000"/>
               <a:buChar char="•"/>
               <a:lnSpc>
                 <a:spcPts val="2200"/>
@@ -16715,10 +16899,12 @@
             </a:r>
           </a:p>
           <a:p>
-            <a:pPr>
+            <a:pPr lvl="0" marL="457200" indent="-228600">
+              <a:buFont typeface="Calibri"/>
               <a:spcAft>
                 <a:spcPts val="1000"/>
               </a:spcAft>
+              <a:buSzPct val="100000"/>
               <a:buChar char="•"/>
               <a:lnSpc>
                 <a:spcPts val="2200"/>
@@ -16854,10 +17040,12 @@
           </a:bodyPr>
           <a:lstStyle/>
           <a:p>
-            <a:pPr>
+            <a:pPr lvl="0" marL="457200" indent="-228600">
+              <a:buFont typeface="Calibri"/>
               <a:spcAft>
                 <a:spcPts val="1000"/>
               </a:spcAft>
+              <a:buSzPct val="100000"/>
               <a:buChar char="•"/>
               <a:lnSpc>
                 <a:spcPts val="2200"/>
@@ -16874,10 +17062,12 @@
             </a:r>
           </a:p>
           <a:p>
-            <a:pPr>
+            <a:pPr lvl="0" marL="457200" indent="-228600">
+              <a:buFont typeface="Calibri"/>
               <a:spcAft>
                 <a:spcPts val="1000"/>
               </a:spcAft>
+              <a:buSzPct val="100000"/>
               <a:buChar char="•"/>
               <a:lnSpc>
                 <a:spcPts val="2200"/>
@@ -16894,10 +17084,12 @@
             </a:r>
           </a:p>
           <a:p>
-            <a:pPr>
+            <a:pPr lvl="0" marL="457200" indent="-228600">
+              <a:buFont typeface="Calibri"/>
               <a:spcAft>
                 <a:spcPts val="1000"/>
               </a:spcAft>
+              <a:buSzPct val="100000"/>
               <a:buChar char="•"/>
               <a:lnSpc>
                 <a:spcPts val="2200"/>
@@ -17033,10 +17225,12 @@
           </a:bodyPr>
           <a:lstStyle/>
           <a:p>
-            <a:pPr>
+            <a:pPr lvl="0" marL="457200" indent="-228600">
+              <a:buFont typeface="Calibri"/>
               <a:spcAft>
                 <a:spcPts val="1000"/>
               </a:spcAft>
+              <a:buSzPct val="100000"/>
               <a:buChar char="•"/>
               <a:lnSpc>
                 <a:spcPts val="2200"/>
@@ -17053,10 +17247,12 @@
             </a:r>
           </a:p>
           <a:p>
-            <a:pPr>
+            <a:pPr lvl="0" marL="457200" indent="-228600">
+              <a:buFont typeface="Calibri"/>
               <a:spcAft>
                 <a:spcPts val="1000"/>
               </a:spcAft>
+              <a:buSzPct val="100000"/>
               <a:buChar char="•"/>
               <a:lnSpc>
                 <a:spcPts val="2200"/>
@@ -17192,10 +17388,12 @@
           </a:bodyPr>
           <a:lstStyle/>
           <a:p>
-            <a:pPr>
+            <a:pPr lvl="0" marL="457200" indent="-228600">
+              <a:buFont typeface="Calibri"/>
               <a:spcAft>
                 <a:spcPts val="1000"/>
               </a:spcAft>
+              <a:buSzPct val="100000"/>
               <a:buChar char="•"/>
               <a:lnSpc>
                 <a:spcPts val="2200"/>
@@ -17212,10 +17410,12 @@
             </a:r>
           </a:p>
           <a:p>
-            <a:pPr>
+            <a:pPr lvl="0" marL="457200" indent="-228600">
+              <a:buFont typeface="Calibri"/>
               <a:spcAft>
                 <a:spcPts val="1000"/>
               </a:spcAft>
+              <a:buSzPct val="100000"/>
               <a:buChar char="•"/>
               <a:lnSpc>
                 <a:spcPts val="2200"/>
@@ -17351,10 +17551,12 @@
           </a:bodyPr>
           <a:lstStyle/>
           <a:p>
-            <a:pPr>
+            <a:pPr lvl="0" marL="457200" indent="-228600">
+              <a:buFont typeface="Calibri"/>
               <a:spcAft>
                 <a:spcPts val="1000"/>
               </a:spcAft>
+              <a:buSzPct val="100000"/>
               <a:buChar char="•"/>
               <a:lnSpc>
                 <a:spcPts val="2200"/>
@@ -17371,10 +17573,12 @@
             </a:r>
           </a:p>
           <a:p>
-            <a:pPr>
+            <a:pPr lvl="0" marL="457200" indent="-228600">
+              <a:buFont typeface="Calibri"/>
               <a:spcAft>
                 <a:spcPts val="1000"/>
               </a:spcAft>
+              <a:buSzPct val="100000"/>
               <a:buChar char="•"/>
               <a:lnSpc>
                 <a:spcPts val="2200"/>
@@ -17391,10 +17595,12 @@
             </a:r>
           </a:p>
           <a:p>
-            <a:pPr>
+            <a:pPr lvl="0" marL="457200" indent="-228600">
+              <a:buFont typeface="Calibri"/>
               <a:spcAft>
                 <a:spcPts val="1000"/>
               </a:spcAft>
+              <a:buSzPct val="100000"/>
               <a:buChar char="•"/>
               <a:lnSpc>
                 <a:spcPts val="2200"/>
@@ -17530,10 +17736,12 @@
           </a:bodyPr>
           <a:lstStyle/>
           <a:p>
-            <a:pPr>
+            <a:pPr lvl="0" marL="457200" indent="-228600">
+              <a:buFont typeface="Calibri"/>
               <a:spcAft>
                 <a:spcPts val="1000"/>
               </a:spcAft>
+              <a:buSzPct val="100000"/>
               <a:buChar char="•"/>
               <a:lnSpc>
                 <a:spcPts val="2200"/>
@@ -17550,10 +17758,12 @@
             </a:r>
           </a:p>
           <a:p>
-            <a:pPr>
+            <a:pPr lvl="0" marL="457200" indent="-228600">
+              <a:buFont typeface="Calibri"/>
               <a:spcAft>
                 <a:spcPts val="1000"/>
               </a:spcAft>
+              <a:buSzPct val="100000"/>
               <a:buChar char="•"/>
               <a:lnSpc>
                 <a:spcPts val="2200"/>
@@ -17570,10 +17780,12 @@
             </a:r>
           </a:p>
           <a:p>
-            <a:pPr>
+            <a:pPr lvl="0" marL="457200" indent="-228600">
+              <a:buFont typeface="Calibri"/>
               <a:spcAft>
                 <a:spcPts val="1000"/>
               </a:spcAft>
+              <a:buSzPct val="100000"/>
               <a:buChar char="•"/>
               <a:lnSpc>
                 <a:spcPts val="2200"/>
@@ -17590,10 +17802,12 @@
             </a:r>
           </a:p>
           <a:p>
-            <a:pPr>
+            <a:pPr lvl="0" marL="457200" indent="-228600">
+              <a:buFont typeface="Calibri"/>
               <a:spcAft>
                 <a:spcPts val="1000"/>
               </a:spcAft>
+              <a:buSzPct val="100000"/>
               <a:buChar char="•"/>
               <a:lnSpc>
                 <a:spcPts val="2200"/>
@@ -17729,10 +17943,12 @@
           </a:bodyPr>
           <a:lstStyle/>
           <a:p>
-            <a:pPr>
+            <a:pPr lvl="0" marL="457200" indent="-228600">
+              <a:buFont typeface="Calibri"/>
               <a:spcAft>
                 <a:spcPts val="1000"/>
               </a:spcAft>
+              <a:buSzPct val="100000"/>
               <a:buChar char="•"/>
               <a:lnSpc>
                 <a:spcPts val="2200"/>
@@ -17749,10 +17965,12 @@
             </a:r>
           </a:p>
           <a:p>
-            <a:pPr>
+            <a:pPr lvl="0" marL="457200" indent="-228600">
+              <a:buFont typeface="Calibri"/>
               <a:spcAft>
                 <a:spcPts val="1000"/>
               </a:spcAft>
+              <a:buSzPct val="100000"/>
               <a:buChar char="•"/>
               <a:lnSpc>
                 <a:spcPts val="2200"/>
@@ -17769,10 +17987,12 @@
             </a:r>
           </a:p>
           <a:p>
-            <a:pPr>
+            <a:pPr lvl="0" marL="457200" indent="-228600">
+              <a:buFont typeface="Calibri"/>
               <a:spcAft>
                 <a:spcPts val="1000"/>
               </a:spcAft>
+              <a:buSzPct val="100000"/>
               <a:buChar char="•"/>
               <a:lnSpc>
                 <a:spcPts val="2200"/>
@@ -17789,10 +18009,12 @@
             </a:r>
           </a:p>
           <a:p>
-            <a:pPr>
+            <a:pPr lvl="0" marL="457200" indent="-228600">
+              <a:buFont typeface="Calibri"/>
               <a:spcAft>
                 <a:spcPts val="1000"/>
               </a:spcAft>
+              <a:buSzPct val="100000"/>
               <a:buChar char="•"/>
               <a:lnSpc>
                 <a:spcPts val="2200"/>
@@ -17928,10 +18150,12 @@
           </a:bodyPr>
           <a:lstStyle/>
           <a:p>
-            <a:pPr>
+            <a:pPr lvl="0" marL="457200" indent="-228600">
+              <a:buFont typeface="Calibri"/>
               <a:spcAft>
                 <a:spcPts val="1000"/>
               </a:spcAft>
+              <a:buSzPct val="100000"/>
               <a:buChar char="•"/>
               <a:lnSpc>
                 <a:spcPts val="2200"/>
@@ -17948,10 +18172,12 @@
             </a:r>
           </a:p>
           <a:p>
-            <a:pPr>
+            <a:pPr lvl="0" marL="457200" indent="-228600">
+              <a:buFont typeface="Calibri"/>
               <a:spcAft>
                 <a:spcPts val="1000"/>
               </a:spcAft>
+              <a:buSzPct val="100000"/>
               <a:buChar char="•"/>
               <a:lnSpc>
                 <a:spcPts val="2200"/>
@@ -17968,10 +18194,12 @@
             </a:r>
           </a:p>
           <a:p>
-            <a:pPr>
+            <a:pPr lvl="0" marL="457200" indent="-228600">
+              <a:buFont typeface="Calibri"/>
               <a:spcAft>
                 <a:spcPts val="1000"/>
               </a:spcAft>
+              <a:buSzPct val="100000"/>
               <a:buChar char="•"/>
               <a:lnSpc>
                 <a:spcPts val="2200"/>
@@ -18107,10 +18335,12 @@
           </a:bodyPr>
           <a:lstStyle/>
           <a:p>
-            <a:pPr>
+            <a:pPr lvl="0" marL="457200" indent="-228600">
+              <a:buFont typeface="Calibri"/>
               <a:spcAft>
                 <a:spcPts val="1000"/>
               </a:spcAft>
+              <a:buSzPct val="100000"/>
               <a:buChar char="•"/>
               <a:lnSpc>
                 <a:spcPts val="2200"/>
@@ -18127,10 +18357,12 @@
             </a:r>
           </a:p>
           <a:p>
-            <a:pPr>
+            <a:pPr lvl="0" marL="457200" indent="-228600">
+              <a:buFont typeface="Calibri"/>
               <a:spcAft>
                 <a:spcPts val="1000"/>
               </a:spcAft>
+              <a:buSzPct val="100000"/>
               <a:buChar char="•"/>
               <a:lnSpc>
                 <a:spcPts val="2200"/>
@@ -18147,10 +18379,12 @@
             </a:r>
           </a:p>
           <a:p>
-            <a:pPr>
+            <a:pPr lvl="0" marL="457200" indent="-228600">
+              <a:buFont typeface="Calibri"/>
               <a:spcAft>
                 <a:spcPts val="1000"/>
               </a:spcAft>
+              <a:buSzPct val="100000"/>
               <a:buChar char="•"/>
               <a:lnSpc>
                 <a:spcPts val="2200"/>
@@ -18167,10 +18401,12 @@
             </a:r>
           </a:p>
           <a:p>
-            <a:pPr>
+            <a:pPr lvl="0" marL="457200" indent="-228600">
+              <a:buFont typeface="Calibri"/>
               <a:spcAft>
                 <a:spcPts val="1000"/>
               </a:spcAft>
+              <a:buSzPct val="100000"/>
               <a:buChar char="•"/>
               <a:lnSpc>
                 <a:spcPts val="2200"/>
@@ -18306,10 +18542,12 @@
           </a:bodyPr>
           <a:lstStyle/>
           <a:p>
-            <a:pPr>
+            <a:pPr lvl="0" marL="457200" indent="-228600">
+              <a:buFont typeface="Calibri"/>
               <a:spcAft>
                 <a:spcPts val="1000"/>
               </a:spcAft>
+              <a:buSzPct val="100000"/>
               <a:buChar char="•"/>
               <a:lnSpc>
                 <a:spcPts val="2200"/>
@@ -18326,10 +18564,12 @@
             </a:r>
           </a:p>
           <a:p>
-            <a:pPr>
+            <a:pPr lvl="0" marL="457200" indent="-228600">
+              <a:buFont typeface="Calibri"/>
               <a:spcAft>
                 <a:spcPts val="1000"/>
               </a:spcAft>
+              <a:buSzPct val="100000"/>
               <a:buChar char="•"/>
               <a:lnSpc>
                 <a:spcPts val="2200"/>
@@ -18346,10 +18586,12 @@
             </a:r>
           </a:p>
           <a:p>
-            <a:pPr>
+            <a:pPr lvl="0" marL="457200" indent="-228600">
+              <a:buFont typeface="Calibri"/>
               <a:spcAft>
                 <a:spcPts val="1000"/>
               </a:spcAft>
+              <a:buSzPct val="100000"/>
               <a:buChar char="•"/>
               <a:lnSpc>
                 <a:spcPts val="2200"/>
@@ -18366,10 +18608,12 @@
             </a:r>
           </a:p>
           <a:p>
-            <a:pPr>
+            <a:pPr lvl="0" marL="457200" indent="-228600">
+              <a:buFont typeface="Calibri"/>
               <a:spcAft>
                 <a:spcPts val="1000"/>
               </a:spcAft>
+              <a:buSzPct val="100000"/>
               <a:buChar char="•"/>
               <a:lnSpc>
                 <a:spcPts val="2200"/>
@@ -18505,10 +18749,12 @@
           </a:bodyPr>
           <a:lstStyle/>
           <a:p>
-            <a:pPr>
+            <a:pPr lvl="0" marL="457200" indent="-228600">
+              <a:buFont typeface="Calibri"/>
               <a:spcAft>
                 <a:spcPts val="1000"/>
               </a:spcAft>
+              <a:buSzPct val="100000"/>
               <a:buChar char="•"/>
               <a:lnSpc>
                 <a:spcPts val="2200"/>
@@ -18525,10 +18771,12 @@
             </a:r>
           </a:p>
           <a:p>
-            <a:pPr>
+            <a:pPr lvl="0" marL="457200" indent="-228600">
+              <a:buFont typeface="Calibri"/>
               <a:spcAft>
                 <a:spcPts val="1000"/>
               </a:spcAft>
+              <a:buSzPct val="100000"/>
               <a:buChar char="•"/>
               <a:lnSpc>
                 <a:spcPts val="2200"/>
@@ -18545,10 +18793,12 @@
             </a:r>
           </a:p>
           <a:p>
-            <a:pPr>
+            <a:pPr lvl="0" marL="457200" indent="-228600">
+              <a:buFont typeface="Calibri"/>
               <a:spcAft>
                 <a:spcPts val="1000"/>
               </a:spcAft>
+              <a:buSzPct val="100000"/>
               <a:buChar char="•"/>
               <a:lnSpc>
                 <a:spcPts val="2200"/>
@@ -18684,10 +18934,12 @@
           </a:bodyPr>
           <a:lstStyle/>
           <a:p>
-            <a:pPr>
+            <a:pPr lvl="0" marL="457200" indent="-228600">
+              <a:buFont typeface="Calibri"/>
               <a:spcAft>
                 <a:spcPts val="1000"/>
               </a:spcAft>
+              <a:buSzPct val="100000"/>
               <a:buChar char="•"/>
               <a:lnSpc>
                 <a:spcPts val="2200"/>
@@ -18704,10 +18956,12 @@
             </a:r>
           </a:p>
           <a:p>
-            <a:pPr>
+            <a:pPr lvl="0" marL="457200" indent="-228600">
+              <a:buFont typeface="Calibri"/>
               <a:spcAft>
                 <a:spcPts val="1000"/>
               </a:spcAft>
+              <a:buSzPct val="100000"/>
               <a:buChar char="•"/>
               <a:lnSpc>
                 <a:spcPts val="2200"/>
@@ -18843,10 +19097,12 @@
           </a:bodyPr>
           <a:lstStyle/>
           <a:p>
-            <a:pPr>
+            <a:pPr lvl="0" marL="457200" indent="-228600">
+              <a:buFont typeface="Calibri"/>
               <a:spcAft>
                 <a:spcPts val="1000"/>
               </a:spcAft>
+              <a:buSzPct val="100000"/>
               <a:buChar char="•"/>
               <a:lnSpc>
                 <a:spcPts val="2200"/>
@@ -18982,10 +19238,12 @@
           </a:bodyPr>
           <a:lstStyle/>
           <a:p>
-            <a:pPr>
+            <a:pPr lvl="0" marL="457200" indent="-228600">
+              <a:buFont typeface="Calibri"/>
               <a:spcAft>
                 <a:spcPts val="1000"/>
               </a:spcAft>
+              <a:buSzPct val="100000"/>
               <a:buChar char="•"/>
               <a:lnSpc>
                 <a:spcPts val="2200"/>
@@ -19002,10 +19260,12 @@
             </a:r>
           </a:p>
           <a:p>
-            <a:pPr>
+            <a:pPr lvl="0" marL="457200" indent="-228600">
+              <a:buFont typeface="Calibri"/>
               <a:spcAft>
                 <a:spcPts val="1000"/>
               </a:spcAft>
+              <a:buSzPct val="100000"/>
               <a:buChar char="•"/>
               <a:lnSpc>
                 <a:spcPts val="2200"/>
@@ -19022,10 +19282,12 @@
             </a:r>
           </a:p>
           <a:p>
-            <a:pPr>
+            <a:pPr lvl="0" marL="457200" indent="-228600">
+              <a:buFont typeface="Calibri"/>
               <a:spcAft>
                 <a:spcPts val="1000"/>
               </a:spcAft>
+              <a:buSzPct val="100000"/>
               <a:buChar char="•"/>
               <a:lnSpc>
                 <a:spcPts val="2200"/>
@@ -19161,10 +19423,12 @@
           </a:bodyPr>
           <a:lstStyle/>
           <a:p>
-            <a:pPr>
+            <a:pPr lvl="0" marL="457200" indent="-228600">
+              <a:buFont typeface="Calibri"/>
               <a:spcAft>
                 <a:spcPts val="1000"/>
               </a:spcAft>
+              <a:buSzPct val="100000"/>
               <a:buChar char="•"/>
               <a:lnSpc>
                 <a:spcPts val="2200"/>
@@ -19181,10 +19445,12 @@
             </a:r>
           </a:p>
           <a:p>
-            <a:pPr>
+            <a:pPr lvl="0" marL="457200" indent="-228600">
+              <a:buFont typeface="Calibri"/>
               <a:spcAft>
                 <a:spcPts val="1000"/>
               </a:spcAft>
+              <a:buSzPct val="100000"/>
               <a:buChar char="•"/>
               <a:lnSpc>
                 <a:spcPts val="2200"/>
@@ -19320,10 +19586,12 @@
           </a:bodyPr>
           <a:lstStyle/>
           <a:p>
-            <a:pPr>
+            <a:pPr lvl="0" marL="457200" indent="-228600">
+              <a:buFont typeface="Calibri"/>
               <a:spcAft>
                 <a:spcPts val="1000"/>
               </a:spcAft>
+              <a:buSzPct val="100000"/>
               <a:buChar char="•"/>
               <a:lnSpc>
                 <a:spcPts val="2200"/>
@@ -19340,10 +19608,12 @@
             </a:r>
           </a:p>
           <a:p>
-            <a:pPr>
+            <a:pPr lvl="0" marL="457200" indent="-228600">
+              <a:buFont typeface="Calibri"/>
               <a:spcAft>
                 <a:spcPts val="1000"/>
               </a:spcAft>
+              <a:buSzPct val="100000"/>
               <a:buChar char="•"/>
               <a:lnSpc>
                 <a:spcPts val="2200"/>
@@ -19479,10 +19749,12 @@
           </a:bodyPr>
           <a:lstStyle/>
           <a:p>
-            <a:pPr>
+            <a:pPr lvl="0" marL="457200" indent="-228600">
+              <a:buFont typeface="Calibri"/>
               <a:spcAft>
                 <a:spcPts val="1000"/>
               </a:spcAft>
+              <a:buSzPct val="100000"/>
               <a:buChar char="•"/>
               <a:lnSpc>
                 <a:spcPts val="2200"/>
@@ -19499,10 +19771,12 @@
             </a:r>
           </a:p>
           <a:p>
-            <a:pPr>
+            <a:pPr lvl="0" marL="457200" indent="-228600">
+              <a:buFont typeface="Calibri"/>
               <a:spcAft>
                 <a:spcPts val="1000"/>
               </a:spcAft>
+              <a:buSzPct val="100000"/>
               <a:buChar char="•"/>
               <a:lnSpc>
                 <a:spcPts val="2200"/>
@@ -19638,10 +19912,12 @@
           </a:bodyPr>
           <a:lstStyle/>
           <a:p>
-            <a:pPr>
+            <a:pPr lvl="0" marL="457200" indent="-228600">
+              <a:buFont typeface="Calibri"/>
               <a:spcAft>
                 <a:spcPts val="1000"/>
               </a:spcAft>
+              <a:buSzPct val="100000"/>
               <a:buChar char="•"/>
               <a:lnSpc>
                 <a:spcPts val="2200"/>
@@ -19658,10 +19934,12 @@
             </a:r>
           </a:p>
           <a:p>
-            <a:pPr>
+            <a:pPr lvl="0" marL="457200" indent="-228600">
+              <a:buFont typeface="Calibri"/>
               <a:spcAft>
                 <a:spcPts val="1000"/>
               </a:spcAft>
+              <a:buSzPct val="100000"/>
               <a:buChar char="•"/>
               <a:lnSpc>
                 <a:spcPts val="2200"/>
@@ -19678,10 +19956,12 @@
             </a:r>
           </a:p>
           <a:p>
-            <a:pPr>
+            <a:pPr lvl="0" marL="457200" indent="-228600">
+              <a:buFont typeface="Calibri"/>
               <a:spcAft>
                 <a:spcPts val="1000"/>
               </a:spcAft>
+              <a:buSzPct val="100000"/>
               <a:buChar char="•"/>
               <a:lnSpc>
                 <a:spcPts val="2200"/>
@@ -19817,10 +20097,12 @@
           </a:bodyPr>
           <a:lstStyle/>
           <a:p>
-            <a:pPr>
+            <a:pPr lvl="0" marL="457200" indent="-228600">
+              <a:buFont typeface="Calibri"/>
               <a:spcAft>
                 <a:spcPts val="1000"/>
               </a:spcAft>
+              <a:buSzPct val="100000"/>
               <a:buChar char="•"/>
               <a:lnSpc>
                 <a:spcPts val="2200"/>
@@ -19837,10 +20119,12 @@
             </a:r>
           </a:p>
           <a:p>
-            <a:pPr>
+            <a:pPr lvl="0" marL="457200" indent="-228600">
+              <a:buFont typeface="Calibri"/>
               <a:spcAft>
                 <a:spcPts val="1000"/>
               </a:spcAft>
+              <a:buSzPct val="100000"/>
               <a:buChar char="•"/>
               <a:lnSpc>
                 <a:spcPts val="2200"/>
@@ -19976,10 +20260,12 @@
           </a:bodyPr>
           <a:lstStyle/>
           <a:p>
-            <a:pPr>
+            <a:pPr lvl="0" marL="457200" indent="-228600">
+              <a:buFont typeface="Calibri"/>
               <a:spcAft>
                 <a:spcPts val="1000"/>
               </a:spcAft>
+              <a:buSzPct val="100000"/>
               <a:buChar char="•"/>
               <a:lnSpc>
                 <a:spcPts val="2200"/>
@@ -19996,10 +20282,12 @@
             </a:r>
           </a:p>
           <a:p>
-            <a:pPr>
+            <a:pPr lvl="0" marL="457200" indent="-228600">
+              <a:buFont typeface="Calibri"/>
               <a:spcAft>
                 <a:spcPts val="1000"/>
               </a:spcAft>
+              <a:buSzPct val="100000"/>
               <a:buChar char="•"/>
               <a:lnSpc>
                 <a:spcPts val="2200"/>
@@ -20016,10 +20304,12 @@
             </a:r>
           </a:p>
           <a:p>
-            <a:pPr>
+            <a:pPr lvl="0" marL="457200" indent="-228600">
+              <a:buFont typeface="Calibri"/>
               <a:spcAft>
                 <a:spcPts val="1000"/>
               </a:spcAft>
+              <a:buSzPct val="100000"/>
               <a:buChar char="•"/>
               <a:lnSpc>
                 <a:spcPts val="2200"/>
@@ -20155,10 +20445,12 @@
           </a:bodyPr>
           <a:lstStyle/>
           <a:p>
-            <a:pPr>
+            <a:pPr lvl="0" marL="457200" indent="-228600">
+              <a:buFont typeface="Calibri"/>
               <a:spcAft>
                 <a:spcPts val="1000"/>
               </a:spcAft>
+              <a:buSzPct val="100000"/>
               <a:buChar char="•"/>
               <a:lnSpc>
                 <a:spcPts val="2200"/>
@@ -20175,10 +20467,12 @@
             </a:r>
           </a:p>
           <a:p>
-            <a:pPr>
+            <a:pPr lvl="0" marL="457200" indent="-228600">
+              <a:buFont typeface="Calibri"/>
               <a:spcAft>
                 <a:spcPts val="1000"/>
               </a:spcAft>
+              <a:buSzPct val="100000"/>
               <a:buChar char="•"/>
               <a:lnSpc>
                 <a:spcPts val="2200"/>
@@ -20314,10 +20608,12 @@
           </a:bodyPr>
           <a:lstStyle/>
           <a:p>
-            <a:pPr>
+            <a:pPr lvl="0" marL="457200" indent="-228600">
+              <a:buFont typeface="Calibri"/>
               <a:spcAft>
                 <a:spcPts val="1000"/>
               </a:spcAft>
+              <a:buSzPct val="100000"/>
               <a:buChar char="•"/>
               <a:lnSpc>
                 <a:spcPts val="2200"/>
@@ -20334,10 +20630,12 @@
             </a:r>
           </a:p>
           <a:p>
-            <a:pPr>
+            <a:pPr lvl="0" marL="457200" indent="-228600">
+              <a:buFont typeface="Calibri"/>
               <a:spcAft>
                 <a:spcPts val="1000"/>
               </a:spcAft>
+              <a:buSzPct val="100000"/>
               <a:buChar char="•"/>
               <a:lnSpc>
                 <a:spcPts val="2200"/>
@@ -20473,10 +20771,12 @@
           </a:bodyPr>
           <a:lstStyle/>
           <a:p>
-            <a:pPr>
+            <a:pPr lvl="0" marL="457200" indent="-228600">
+              <a:buFont typeface="Calibri"/>
               <a:spcAft>
                 <a:spcPts val="1000"/>
               </a:spcAft>
+              <a:buSzPct val="100000"/>
               <a:buChar char="•"/>
               <a:lnSpc>
                 <a:spcPts val="2200"/>
@@ -20493,10 +20793,12 @@
             </a:r>
           </a:p>
           <a:p>
-            <a:pPr>
+            <a:pPr lvl="0" marL="457200" indent="-228600">
+              <a:buFont typeface="Calibri"/>
               <a:spcAft>
                 <a:spcPts val="1000"/>
               </a:spcAft>
+              <a:buSzPct val="100000"/>
               <a:buChar char="•"/>
               <a:lnSpc>
                 <a:spcPts val="2200"/>
@@ -20632,10 +20934,12 @@
           </a:bodyPr>
           <a:lstStyle/>
           <a:p>
-            <a:pPr>
+            <a:pPr lvl="0" marL="457200" indent="-228600">
+              <a:buFont typeface="Calibri"/>
               <a:spcAft>
                 <a:spcPts val="1000"/>
               </a:spcAft>
+              <a:buSzPct val="100000"/>
               <a:buChar char="•"/>
               <a:lnSpc>
                 <a:spcPts val="2200"/>
@@ -20652,10 +20956,12 @@
             </a:r>
           </a:p>
           <a:p>
-            <a:pPr>
+            <a:pPr lvl="0" marL="457200" indent="-228600">
+              <a:buFont typeface="Calibri"/>
               <a:spcAft>
                 <a:spcPts val="1000"/>
               </a:spcAft>
+              <a:buSzPct val="100000"/>
               <a:buChar char="•"/>
               <a:lnSpc>
                 <a:spcPts val="2200"/>
@@ -20672,10 +20978,12 @@
             </a:r>
           </a:p>
           <a:p>
-            <a:pPr>
+            <a:pPr lvl="0" marL="457200" indent="-228600">
+              <a:buFont typeface="Calibri"/>
               <a:spcAft>
                 <a:spcPts val="1000"/>
               </a:spcAft>
+              <a:buSzPct val="100000"/>
               <a:buChar char="•"/>
               <a:lnSpc>
                 <a:spcPts val="2200"/>
@@ -20811,10 +21119,12 @@
           </a:bodyPr>
           <a:lstStyle/>
           <a:p>
-            <a:pPr>
+            <a:pPr lvl="0" marL="457200" indent="-228600">
+              <a:buFont typeface="Calibri"/>
               <a:spcAft>
                 <a:spcPts val="1000"/>
               </a:spcAft>
+              <a:buSzPct val="100000"/>
               <a:buChar char="•"/>
               <a:lnSpc>
                 <a:spcPts val="2200"/>
@@ -20831,10 +21141,12 @@
             </a:r>
           </a:p>
           <a:p>
-            <a:pPr>
+            <a:pPr lvl="0" marL="457200" indent="-228600">
+              <a:buFont typeface="Calibri"/>
               <a:spcAft>
                 <a:spcPts val="1000"/>
               </a:spcAft>
+              <a:buSzPct val="100000"/>
               <a:buChar char="•"/>
               <a:lnSpc>
                 <a:spcPts val="2200"/>
@@ -20851,10 +21163,12 @@
             </a:r>
           </a:p>
           <a:p>
-            <a:pPr>
+            <a:pPr lvl="0" marL="457200" indent="-228600">
+              <a:buFont typeface="Calibri"/>
               <a:spcAft>
                 <a:spcPts val="1000"/>
               </a:spcAft>
+              <a:buSzPct val="100000"/>
               <a:buChar char="•"/>
               <a:lnSpc>
                 <a:spcPts val="2200"/>
@@ -20990,10 +21304,12 @@
           </a:bodyPr>
           <a:lstStyle/>
           <a:p>
-            <a:pPr>
+            <a:pPr lvl="0" marL="457200" indent="-228600">
+              <a:buFont typeface="Calibri"/>
               <a:spcAft>
                 <a:spcPts val="1000"/>
               </a:spcAft>
+              <a:buSzPct val="100000"/>
               <a:buChar char="•"/>
               <a:lnSpc>
                 <a:spcPts val="2200"/>
@@ -21010,10 +21326,12 @@
             </a:r>
           </a:p>
           <a:p>
-            <a:pPr>
+            <a:pPr lvl="0" marL="457200" indent="-228600">
+              <a:buFont typeface="Calibri"/>
               <a:spcAft>
                 <a:spcPts val="1000"/>
               </a:spcAft>
+              <a:buSzPct val="100000"/>
               <a:buChar char="•"/>
               <a:lnSpc>
                 <a:spcPts val="2200"/>
@@ -21030,10 +21348,12 @@
             </a:r>
           </a:p>
           <a:p>
-            <a:pPr>
+            <a:pPr lvl="0" marL="457200" indent="-228600">
+              <a:buFont typeface="Calibri"/>
               <a:spcAft>
                 <a:spcPts val="1000"/>
               </a:spcAft>
+              <a:buSzPct val="100000"/>
               <a:buChar char="•"/>
               <a:lnSpc>
                 <a:spcPts val="2200"/>
@@ -21050,10 +21370,12 @@
             </a:r>
           </a:p>
           <a:p>
-            <a:pPr>
+            <a:pPr lvl="0" marL="457200" indent="-228600">
+              <a:buFont typeface="Calibri"/>
               <a:spcAft>
                 <a:spcPts val="1000"/>
               </a:spcAft>
+              <a:buSzPct val="100000"/>
               <a:buChar char="•"/>
               <a:lnSpc>
                 <a:spcPts val="2200"/>
@@ -21189,10 +21511,12 @@
           </a:bodyPr>
           <a:lstStyle/>
           <a:p>
-            <a:pPr>
+            <a:pPr lvl="0" marL="457200" indent="-228600">
+              <a:buFont typeface="Calibri"/>
               <a:spcAft>
                 <a:spcPts val="1000"/>
               </a:spcAft>
+              <a:buSzPct val="100000"/>
               <a:buChar char="•"/>
               <a:lnSpc>
                 <a:spcPts val="2200"/>
@@ -21209,10 +21533,12 @@
             </a:r>
           </a:p>
           <a:p>
-            <a:pPr>
+            <a:pPr lvl="0" marL="457200" indent="-228600">
+              <a:buFont typeface="Calibri"/>
               <a:spcAft>
                 <a:spcPts val="1000"/>
               </a:spcAft>
+              <a:buSzPct val="100000"/>
               <a:buChar char="•"/>
               <a:lnSpc>
                 <a:spcPts val="2200"/>
@@ -21348,10 +21674,12 @@
           </a:bodyPr>
           <a:lstStyle/>
           <a:p>
-            <a:pPr>
+            <a:pPr lvl="0" marL="457200" indent="-228600">
+              <a:buFont typeface="Calibri"/>
               <a:spcAft>
                 <a:spcPts val="1000"/>
               </a:spcAft>
+              <a:buSzPct val="100000"/>
               <a:buChar char="•"/>
               <a:lnSpc>
                 <a:spcPts val="2200"/>
@@ -21368,10 +21696,12 @@
             </a:r>
           </a:p>
           <a:p>
-            <a:pPr>
+            <a:pPr lvl="0" marL="457200" indent="-228600">
+              <a:buFont typeface="Calibri"/>
               <a:spcAft>
                 <a:spcPts val="1000"/>
               </a:spcAft>
+              <a:buSzPct val="100000"/>
               <a:buChar char="•"/>
               <a:lnSpc>
                 <a:spcPts val="2200"/>
@@ -21507,10 +21837,12 @@
           </a:bodyPr>
           <a:lstStyle/>
           <a:p>
-            <a:pPr>
+            <a:pPr lvl="0" marL="457200" indent="-228600">
+              <a:buFont typeface="Calibri"/>
               <a:spcAft>
                 <a:spcPts val="1000"/>
               </a:spcAft>
+              <a:buSzPct val="100000"/>
               <a:buChar char="•"/>
               <a:lnSpc>
                 <a:spcPts val="2200"/>
@@ -21527,10 +21859,12 @@
             </a:r>
           </a:p>
           <a:p>
-            <a:pPr>
+            <a:pPr lvl="0" marL="457200" indent="-228600">
+              <a:buFont typeface="Calibri"/>
               <a:spcAft>
                 <a:spcPts val="1000"/>
               </a:spcAft>
+              <a:buSzPct val="100000"/>
               <a:buChar char="•"/>
               <a:lnSpc>
                 <a:spcPts val="2200"/>
@@ -21547,10 +21881,12 @@
             </a:r>
           </a:p>
           <a:p>
-            <a:pPr>
+            <a:pPr lvl="0" marL="457200" indent="-228600">
+              <a:buFont typeface="Calibri"/>
               <a:spcAft>
                 <a:spcPts val="1000"/>
               </a:spcAft>
+              <a:buSzPct val="100000"/>
               <a:buChar char="•"/>
               <a:lnSpc>
                 <a:spcPts val="2200"/>
@@ -21686,10 +22022,12 @@
           </a:bodyPr>
           <a:lstStyle/>
           <a:p>
-            <a:pPr>
+            <a:pPr lvl="0" marL="457200" indent="-228600">
+              <a:buFont typeface="Calibri"/>
               <a:spcAft>
                 <a:spcPts val="1000"/>
               </a:spcAft>
+              <a:buSzPct val="100000"/>
               <a:buChar char="•"/>
               <a:lnSpc>
                 <a:spcPts val="2200"/>
@@ -21706,10 +22044,12 @@
             </a:r>
           </a:p>
           <a:p>
-            <a:pPr>
+            <a:pPr lvl="0" marL="457200" indent="-228600">
+              <a:buFont typeface="Calibri"/>
               <a:spcAft>
                 <a:spcPts val="1000"/>
               </a:spcAft>
+              <a:buSzPct val="100000"/>
               <a:buChar char="•"/>
               <a:lnSpc>
                 <a:spcPts val="2200"/>
@@ -21845,10 +22185,12 @@
           </a:bodyPr>
           <a:lstStyle/>
           <a:p>
-            <a:pPr>
+            <a:pPr lvl="0" marL="457200" indent="-228600">
+              <a:buFont typeface="Calibri"/>
               <a:spcAft>
                 <a:spcPts val="1000"/>
               </a:spcAft>
+              <a:buSzPct val="100000"/>
               <a:buChar char="•"/>
               <a:lnSpc>
                 <a:spcPts val="2200"/>
@@ -21865,10 +22207,12 @@
             </a:r>
           </a:p>
           <a:p>
-            <a:pPr>
+            <a:pPr lvl="0" marL="457200" indent="-228600">
+              <a:buFont typeface="Calibri"/>
               <a:spcAft>
                 <a:spcPts val="1000"/>
               </a:spcAft>
+              <a:buSzPct val="100000"/>
               <a:buChar char="•"/>
               <a:lnSpc>
                 <a:spcPts val="2200"/>
@@ -22004,10 +22348,12 @@
           </a:bodyPr>
           <a:lstStyle/>
           <a:p>
-            <a:pPr>
+            <a:pPr lvl="0" marL="457200" indent="-228600">
+              <a:buFont typeface="Calibri"/>
               <a:spcAft>
                 <a:spcPts val="1000"/>
               </a:spcAft>
+              <a:buSzPct val="100000"/>
               <a:buChar char="•"/>
               <a:lnSpc>
                 <a:spcPts val="2200"/>
@@ -22024,10 +22370,12 @@
             </a:r>
           </a:p>
           <a:p>
-            <a:pPr>
+            <a:pPr lvl="0" marL="457200" indent="-228600">
+              <a:buFont typeface="Calibri"/>
               <a:spcAft>
                 <a:spcPts val="1000"/>
               </a:spcAft>
+              <a:buSzPct val="100000"/>
               <a:buChar char="•"/>
               <a:lnSpc>
                 <a:spcPts val="2200"/>
@@ -22044,10 +22392,12 @@
             </a:r>
           </a:p>
           <a:p>
-            <a:pPr>
+            <a:pPr lvl="0" marL="457200" indent="-228600">
+              <a:buFont typeface="Calibri"/>
               <a:spcAft>
                 <a:spcPts val="1000"/>
               </a:spcAft>
+              <a:buSzPct val="100000"/>
               <a:buChar char="•"/>
               <a:lnSpc>
                 <a:spcPts val="2200"/>
@@ -22064,10 +22414,12 @@
             </a:r>
           </a:p>
           <a:p>
-            <a:pPr>
+            <a:pPr lvl="0" marL="457200" indent="-228600">
+              <a:buFont typeface="Calibri"/>
               <a:spcAft>
                 <a:spcPts val="1000"/>
               </a:spcAft>
+              <a:buSzPct val="100000"/>
               <a:buChar char="•"/>
               <a:lnSpc>
                 <a:spcPts val="2200"/>
@@ -22203,10 +22555,12 @@
           </a:bodyPr>
           <a:lstStyle/>
           <a:p>
-            <a:pPr>
+            <a:pPr lvl="0" marL="457200" indent="-228600">
+              <a:buFont typeface="Calibri"/>
               <a:spcAft>
                 <a:spcPts val="1000"/>
               </a:spcAft>
+              <a:buSzPct val="100000"/>
               <a:buChar char="•"/>
               <a:lnSpc>
                 <a:spcPts val="2200"/>
@@ -22223,10 +22577,12 @@
             </a:r>
           </a:p>
           <a:p>
-            <a:pPr>
+            <a:pPr lvl="0" marL="457200" indent="-228600">
+              <a:buFont typeface="Calibri"/>
               <a:spcAft>
                 <a:spcPts val="1000"/>
               </a:spcAft>
+              <a:buSzPct val="100000"/>
               <a:buChar char="•"/>
               <a:lnSpc>
                 <a:spcPts val="2200"/>
@@ -22362,10 +22718,12 @@
           </a:bodyPr>
           <a:lstStyle/>
           <a:p>
-            <a:pPr>
+            <a:pPr lvl="0" marL="457200" indent="-228600">
+              <a:buFont typeface="Calibri"/>
               <a:spcAft>
                 <a:spcPts val="1000"/>
               </a:spcAft>
+              <a:buSzPct val="100000"/>
               <a:buChar char="•"/>
               <a:lnSpc>
                 <a:spcPts val="2200"/>
@@ -22382,10 +22740,12 @@
             </a:r>
           </a:p>
           <a:p>
-            <a:pPr>
+            <a:pPr lvl="0" marL="457200" indent="-228600">
+              <a:buFont typeface="Calibri"/>
               <a:spcAft>
                 <a:spcPts val="1000"/>
               </a:spcAft>
+              <a:buSzPct val="100000"/>
               <a:buChar char="•"/>
               <a:lnSpc>
                 <a:spcPts val="2200"/>
@@ -22521,10 +22881,12 @@
           </a:bodyPr>
           <a:lstStyle/>
           <a:p>
-            <a:pPr>
+            <a:pPr lvl="0" marL="457200" indent="-228600">
+              <a:buFont typeface="Calibri"/>
               <a:spcAft>
                 <a:spcPts val="1000"/>
               </a:spcAft>
+              <a:buSzPct val="100000"/>
               <a:buChar char="•"/>
               <a:lnSpc>
                 <a:spcPts val="2200"/>
@@ -22541,10 +22903,12 @@
             </a:r>
           </a:p>
           <a:p>
-            <a:pPr>
+            <a:pPr lvl="0" marL="457200" indent="-228600">
+              <a:buFont typeface="Calibri"/>
               <a:spcAft>
                 <a:spcPts val="1000"/>
               </a:spcAft>
+              <a:buSzPct val="100000"/>
               <a:buChar char="•"/>
               <a:lnSpc>
                 <a:spcPts val="2200"/>
@@ -22680,10 +23044,12 @@
           </a:bodyPr>
           <a:lstStyle/>
           <a:p>
-            <a:pPr>
+            <a:pPr lvl="0" marL="457200" indent="-228600">
+              <a:buFont typeface="Calibri"/>
               <a:spcAft>
                 <a:spcPts val="1000"/>
               </a:spcAft>
+              <a:buSzPct val="100000"/>
               <a:buChar char="•"/>
               <a:lnSpc>
                 <a:spcPts val="2200"/>
@@ -22700,10 +23066,12 @@
             </a:r>
           </a:p>
           <a:p>
-            <a:pPr>
+            <a:pPr lvl="0" marL="457200" indent="-228600">
+              <a:buFont typeface="Calibri"/>
               <a:spcAft>
                 <a:spcPts val="1000"/>
               </a:spcAft>
+              <a:buSzPct val="100000"/>
               <a:buChar char="•"/>
               <a:lnSpc>
                 <a:spcPts val="2200"/>
@@ -22720,10 +23088,12 @@
             </a:r>
           </a:p>
           <a:p>
-            <a:pPr>
+            <a:pPr lvl="0" marL="457200" indent="-228600">
+              <a:buFont typeface="Calibri"/>
               <a:spcAft>
                 <a:spcPts val="1000"/>
               </a:spcAft>
+              <a:buSzPct val="100000"/>
               <a:buChar char="•"/>
               <a:lnSpc>
                 <a:spcPts val="2200"/>
@@ -22859,10 +23229,12 @@
           </a:bodyPr>
           <a:lstStyle/>
           <a:p>
-            <a:pPr>
+            <a:pPr lvl="0" marL="457200" indent="-228600">
+              <a:buFont typeface="Calibri"/>
               <a:spcAft>
                 <a:spcPts val="1000"/>
               </a:spcAft>
+              <a:buSzPct val="100000"/>
               <a:buChar char="•"/>
               <a:lnSpc>
                 <a:spcPts val="2200"/>
@@ -22879,10 +23251,12 @@
             </a:r>
           </a:p>
           <a:p>
-            <a:pPr>
+            <a:pPr lvl="0" marL="457200" indent="-228600">
+              <a:buFont typeface="Calibri"/>
               <a:spcAft>
                 <a:spcPts val="1000"/>
               </a:spcAft>
+              <a:buSzPct val="100000"/>
               <a:buChar char="•"/>
               <a:lnSpc>
                 <a:spcPts val="2200"/>
@@ -23018,10 +23392,12 @@
           </a:bodyPr>
           <a:lstStyle/>
           <a:p>
-            <a:pPr>
+            <a:pPr lvl="0" marL="457200" indent="-228600">
+              <a:buFont typeface="Calibri"/>
               <a:spcAft>
                 <a:spcPts val="1000"/>
               </a:spcAft>
+              <a:buSzPct val="100000"/>
               <a:buChar char="•"/>
               <a:lnSpc>
                 <a:spcPts val="2200"/>
@@ -23038,10 +23414,12 @@
             </a:r>
           </a:p>
           <a:p>
-            <a:pPr>
+            <a:pPr lvl="0" marL="457200" indent="-228600">
+              <a:buFont typeface="Calibri"/>
               <a:spcAft>
                 <a:spcPts val="1000"/>
               </a:spcAft>
+              <a:buSzPct val="100000"/>
               <a:buChar char="•"/>
               <a:lnSpc>
                 <a:spcPts val="2200"/>
@@ -23058,10 +23436,12 @@
             </a:r>
           </a:p>
           <a:p>
-            <a:pPr>
+            <a:pPr lvl="0" marL="457200" indent="-228600">
+              <a:buFont typeface="Calibri"/>
               <a:spcAft>
                 <a:spcPts val="1000"/>
               </a:spcAft>
+              <a:buSzPct val="100000"/>
               <a:buChar char="•"/>
               <a:lnSpc>
                 <a:spcPts val="2200"/>
@@ -23197,10 +23577,12 @@
           </a:bodyPr>
           <a:lstStyle/>
           <a:p>
-            <a:pPr>
+            <a:pPr lvl="0" marL="457200" indent="-228600">
+              <a:buFont typeface="Calibri"/>
               <a:spcAft>
                 <a:spcPts val="1000"/>
               </a:spcAft>
+              <a:buSzPct val="100000"/>
               <a:buChar char="•"/>
               <a:lnSpc>
                 <a:spcPts val="2200"/>
@@ -23217,10 +23599,12 @@
             </a:r>
           </a:p>
           <a:p>
-            <a:pPr>
+            <a:pPr lvl="0" marL="457200" indent="-228600">
+              <a:buFont typeface="Calibri"/>
               <a:spcAft>
                 <a:spcPts val="1000"/>
               </a:spcAft>
+              <a:buSzPct val="100000"/>
               <a:buChar char="•"/>
               <a:lnSpc>
                 <a:spcPts val="2200"/>
@@ -23356,10 +23740,12 @@
           </a:bodyPr>
           <a:lstStyle/>
           <a:p>
-            <a:pPr>
+            <a:pPr lvl="0" marL="457200" indent="-228600">
+              <a:buFont typeface="Calibri"/>
               <a:spcAft>
                 <a:spcPts val="1000"/>
               </a:spcAft>
+              <a:buSzPct val="100000"/>
               <a:buChar char="•"/>
               <a:lnSpc>
                 <a:spcPts val="2200"/>
@@ -23376,10 +23762,12 @@
             </a:r>
           </a:p>
           <a:p>
-            <a:pPr>
+            <a:pPr lvl="0" marL="457200" indent="-228600">
+              <a:buFont typeface="Calibri"/>
               <a:spcAft>
                 <a:spcPts val="1000"/>
               </a:spcAft>
+              <a:buSzPct val="100000"/>
               <a:buChar char="•"/>
               <a:lnSpc>
                 <a:spcPts val="2200"/>
@@ -23515,10 +23903,12 @@
           </a:bodyPr>
           <a:lstStyle/>
           <a:p>
-            <a:pPr>
+            <a:pPr lvl="0" marL="457200" indent="-228600">
+              <a:buFont typeface="Calibri"/>
               <a:spcAft>
                 <a:spcPts val="1000"/>
               </a:spcAft>
+              <a:buSzPct val="100000"/>
               <a:buChar char="•"/>
               <a:lnSpc>
                 <a:spcPts val="2200"/>
@@ -23535,10 +23925,12 @@
             </a:r>
           </a:p>
           <a:p>
-            <a:pPr>
+            <a:pPr lvl="0" marL="457200" indent="-228600">
+              <a:buFont typeface="Calibri"/>
               <a:spcAft>
                 <a:spcPts val="1000"/>
               </a:spcAft>
+              <a:buSzPct val="100000"/>
               <a:buChar char="•"/>
               <a:lnSpc>
                 <a:spcPts val="2200"/>
@@ -23555,10 +23947,12 @@
             </a:r>
           </a:p>
           <a:p>
-            <a:pPr>
+            <a:pPr lvl="0" marL="457200" indent="-228600">
+              <a:buFont typeface="Calibri"/>
               <a:spcAft>
                 <a:spcPts val="1000"/>
               </a:spcAft>
+              <a:buSzPct val="100000"/>
               <a:buChar char="•"/>
               <a:lnSpc>
                 <a:spcPts val="2200"/>
@@ -23694,10 +24088,12 @@
           </a:bodyPr>
           <a:lstStyle/>
           <a:p>
-            <a:pPr>
+            <a:pPr lvl="0" marL="457200" indent="-228600">
+              <a:buFont typeface="Calibri"/>
               <a:spcAft>
                 <a:spcPts val="1000"/>
               </a:spcAft>
+              <a:buSzPct val="100000"/>
               <a:buChar char="•"/>
               <a:lnSpc>
                 <a:spcPts val="2200"/>
@@ -23714,10 +24110,12 @@
             </a:r>
           </a:p>
           <a:p>
-            <a:pPr>
+            <a:pPr lvl="0" marL="457200" indent="-228600">
+              <a:buFont typeface="Calibri"/>
               <a:spcAft>
                 <a:spcPts val="1000"/>
               </a:spcAft>
+              <a:buSzPct val="100000"/>
               <a:buChar char="•"/>
               <a:lnSpc>
                 <a:spcPts val="2200"/>
@@ -23734,10 +24132,12 @@
             </a:r>
           </a:p>
           <a:p>
-            <a:pPr>
+            <a:pPr lvl="0" marL="457200" indent="-228600">
+              <a:buFont typeface="Calibri"/>
               <a:spcAft>
                 <a:spcPts val="1000"/>
               </a:spcAft>
+              <a:buSzPct val="100000"/>
               <a:buChar char="•"/>
               <a:lnSpc>
                 <a:spcPts val="2200"/>
@@ -23873,10 +24273,12 @@
           </a:bodyPr>
           <a:lstStyle/>
           <a:p>
-            <a:pPr>
+            <a:pPr lvl="0" marL="457200" indent="-228600">
+              <a:buFont typeface="Calibri"/>
               <a:spcAft>
                 <a:spcPts val="1000"/>
               </a:spcAft>
+              <a:buSzPct val="100000"/>
               <a:buChar char="•"/>
               <a:lnSpc>
                 <a:spcPts val="2200"/>
@@ -23893,10 +24295,12 @@
             </a:r>
           </a:p>
           <a:p>
-            <a:pPr>
+            <a:pPr lvl="0" marL="457200" indent="-228600">
+              <a:buFont typeface="Calibri"/>
               <a:spcAft>
                 <a:spcPts val="1000"/>
               </a:spcAft>
+              <a:buSzPct val="100000"/>
               <a:buChar char="•"/>
               <a:lnSpc>
                 <a:spcPts val="2200"/>
@@ -23913,10 +24317,12 @@
             </a:r>
           </a:p>
           <a:p>
-            <a:pPr>
+            <a:pPr lvl="0" marL="457200" indent="-228600">
+              <a:buFont typeface="Calibri"/>
               <a:spcAft>
                 <a:spcPts val="1000"/>
               </a:spcAft>
+              <a:buSzPct val="100000"/>
               <a:buChar char="•"/>
               <a:lnSpc>
                 <a:spcPts val="2200"/>
@@ -24052,10 +24458,12 @@
           </a:bodyPr>
           <a:lstStyle/>
           <a:p>
-            <a:pPr>
+            <a:pPr lvl="0" marL="457200" indent="-228600">
+              <a:buFont typeface="Calibri"/>
               <a:spcAft>
                 <a:spcPts val="1000"/>
               </a:spcAft>
+              <a:buSzPct val="100000"/>
               <a:buChar char="•"/>
               <a:lnSpc>
                 <a:spcPts val="2200"/>
@@ -24072,10 +24480,12 @@
             </a:r>
           </a:p>
           <a:p>
-            <a:pPr>
+            <a:pPr lvl="0" marL="457200" indent="-228600">
+              <a:buFont typeface="Calibri"/>
               <a:spcAft>
                 <a:spcPts val="1000"/>
               </a:spcAft>
+              <a:buSzPct val="100000"/>
               <a:buChar char="•"/>
               <a:lnSpc>
                 <a:spcPts val="2200"/>
@@ -24211,10 +24621,12 @@
           </a:bodyPr>
           <a:lstStyle/>
           <a:p>
-            <a:pPr>
+            <a:pPr lvl="0" marL="457200" indent="-228600">
+              <a:buFont typeface="Calibri"/>
               <a:spcAft>
                 <a:spcPts val="1000"/>
               </a:spcAft>
+              <a:buSzPct val="100000"/>
               <a:buChar char="•"/>
               <a:lnSpc>
                 <a:spcPts val="2200"/>
@@ -24231,10 +24643,12 @@
             </a:r>
           </a:p>
           <a:p>
-            <a:pPr>
+            <a:pPr lvl="0" marL="457200" indent="-228600">
+              <a:buFont typeface="Calibri"/>
               <a:spcAft>
                 <a:spcPts val="1000"/>
               </a:spcAft>
+              <a:buSzPct val="100000"/>
               <a:buChar char="•"/>
               <a:lnSpc>
                 <a:spcPts val="2200"/>
@@ -24251,10 +24665,12 @@
             </a:r>
           </a:p>
           <a:p>
-            <a:pPr>
+            <a:pPr lvl="0" marL="457200" indent="-228600">
+              <a:buFont typeface="Calibri"/>
               <a:spcAft>
                 <a:spcPts val="1000"/>
               </a:spcAft>
+              <a:buSzPct val="100000"/>
               <a:buChar char="•"/>
               <a:lnSpc>
                 <a:spcPts val="2200"/>
@@ -24390,10 +24806,12 @@
           </a:bodyPr>
           <a:lstStyle/>
           <a:p>
-            <a:pPr>
+            <a:pPr lvl="0" marL="457200" indent="-228600">
+              <a:buFont typeface="Calibri"/>
               <a:spcAft>
                 <a:spcPts val="1000"/>
               </a:spcAft>
+              <a:buSzPct val="100000"/>
               <a:buChar char="•"/>
               <a:lnSpc>
                 <a:spcPts val="2200"/>
@@ -24410,10 +24828,12 @@
             </a:r>
           </a:p>
           <a:p>
-            <a:pPr>
+            <a:pPr lvl="0" marL="457200" indent="-228600">
+              <a:buFont typeface="Calibri"/>
               <a:spcAft>
                 <a:spcPts val="1000"/>
               </a:spcAft>
+              <a:buSzPct val="100000"/>
               <a:buChar char="•"/>
               <a:lnSpc>
                 <a:spcPts val="2200"/>
@@ -24549,10 +24969,12 @@
           </a:bodyPr>
           <a:lstStyle/>
           <a:p>
-            <a:pPr>
+            <a:pPr lvl="0" marL="457200" indent="-228600">
+              <a:buFont typeface="Calibri"/>
               <a:spcAft>
                 <a:spcPts val="1000"/>
               </a:spcAft>
+              <a:buSzPct val="100000"/>
               <a:buChar char="•"/>
               <a:lnSpc>
                 <a:spcPts val="2200"/>
@@ -24569,10 +24991,12 @@
             </a:r>
           </a:p>
           <a:p>
-            <a:pPr>
+            <a:pPr lvl="0" marL="457200" indent="-228600">
+              <a:buFont typeface="Calibri"/>
               <a:spcAft>
                 <a:spcPts val="1000"/>
               </a:spcAft>
+              <a:buSzPct val="100000"/>
               <a:buChar char="•"/>
               <a:lnSpc>
                 <a:spcPts val="2200"/>
@@ -24708,10 +25132,12 @@
           </a:bodyPr>
           <a:lstStyle/>
           <a:p>
-            <a:pPr>
+            <a:pPr lvl="0" marL="457200" indent="-228600">
+              <a:buFont typeface="Calibri"/>
               <a:spcAft>
                 <a:spcPts val="1000"/>
               </a:spcAft>
+              <a:buSzPct val="100000"/>
               <a:buChar char="•"/>
               <a:lnSpc>
                 <a:spcPts val="2200"/>
@@ -24728,10 +25154,12 @@
             </a:r>
           </a:p>
           <a:p>
-            <a:pPr>
+            <a:pPr lvl="0" marL="457200" indent="-228600">
+              <a:buFont typeface="Calibri"/>
               <a:spcAft>
                 <a:spcPts val="1000"/>
               </a:spcAft>
+              <a:buSzPct val="100000"/>
               <a:buChar char="•"/>
               <a:lnSpc>
                 <a:spcPts val="2200"/>
@@ -24867,10 +25295,12 @@
           </a:bodyPr>
           <a:lstStyle/>
           <a:p>
-            <a:pPr>
+            <a:pPr lvl="0" marL="457200" indent="-228600">
+              <a:buFont typeface="Calibri"/>
               <a:spcAft>
                 <a:spcPts val="1000"/>
               </a:spcAft>
+              <a:buSzPct val="100000"/>
               <a:buChar char="•"/>
               <a:lnSpc>
                 <a:spcPts val="2200"/>
@@ -24887,10 +25317,12 @@
             </a:r>
           </a:p>
           <a:p>
-            <a:pPr>
+            <a:pPr lvl="0" marL="457200" indent="-228600">
+              <a:buFont typeface="Calibri"/>
               <a:spcAft>
                 <a:spcPts val="1000"/>
               </a:spcAft>
+              <a:buSzPct val="100000"/>
               <a:buChar char="•"/>
               <a:lnSpc>
                 <a:spcPts val="2200"/>
@@ -25026,10 +25458,12 @@
           </a:bodyPr>
           <a:lstStyle/>
           <a:p>
-            <a:pPr>
+            <a:pPr lvl="0" marL="457200" indent="-228600">
+              <a:buFont typeface="Calibri"/>
               <a:spcAft>
                 <a:spcPts val="1000"/>
               </a:spcAft>
+              <a:buSzPct val="100000"/>
               <a:buChar char="•"/>
               <a:lnSpc>
                 <a:spcPts val="2200"/>
@@ -25046,10 +25480,12 @@
             </a:r>
           </a:p>
           <a:p>
-            <a:pPr>
+            <a:pPr lvl="0" marL="457200" indent="-228600">
+              <a:buFont typeface="Calibri"/>
               <a:spcAft>
                 <a:spcPts val="1000"/>
               </a:spcAft>
+              <a:buSzPct val="100000"/>
               <a:buChar char="•"/>
               <a:lnSpc>
                 <a:spcPts val="2200"/>
@@ -25185,10 +25621,12 @@
           </a:bodyPr>
           <a:lstStyle/>
           <a:p>
-            <a:pPr>
+            <a:pPr lvl="0" marL="457200" indent="-228600">
+              <a:buFont typeface="Calibri"/>
               <a:spcAft>
                 <a:spcPts val="1000"/>
               </a:spcAft>
+              <a:buSzPct val="100000"/>
               <a:buChar char="•"/>
               <a:lnSpc>
                 <a:spcPts val="2200"/>
@@ -25205,10 +25643,12 @@
             </a:r>
           </a:p>
           <a:p>
-            <a:pPr>
+            <a:pPr lvl="0" marL="457200" indent="-228600">
+              <a:buFont typeface="Calibri"/>
               <a:spcAft>
                 <a:spcPts val="1000"/>
               </a:spcAft>
+              <a:buSzPct val="100000"/>
               <a:buChar char="•"/>
               <a:lnSpc>
                 <a:spcPts val="2200"/>
@@ -25225,10 +25665,12 @@
             </a:r>
           </a:p>
           <a:p>
-            <a:pPr>
+            <a:pPr lvl="0" marL="457200" indent="-228600">
+              <a:buFont typeface="Calibri"/>
               <a:spcAft>
                 <a:spcPts val="1000"/>
               </a:spcAft>
+              <a:buSzPct val="100000"/>
               <a:buChar char="•"/>
               <a:lnSpc>
                 <a:spcPts val="2200"/>
@@ -25364,10 +25806,12 @@
           </a:bodyPr>
           <a:lstStyle/>
           <a:p>
-            <a:pPr>
+            <a:pPr lvl="0" marL="457200" indent="-228600">
+              <a:buFont typeface="Calibri"/>
               <a:spcAft>
                 <a:spcPts val="1000"/>
               </a:spcAft>
+              <a:buSzPct val="100000"/>
               <a:buChar char="•"/>
               <a:lnSpc>
                 <a:spcPts val="2200"/>
@@ -25384,10 +25828,12 @@
             </a:r>
           </a:p>
           <a:p>
-            <a:pPr>
+            <a:pPr lvl="0" marL="457200" indent="-228600">
+              <a:buFont typeface="Calibri"/>
               <a:spcAft>
                 <a:spcPts val="1000"/>
               </a:spcAft>
+              <a:buSzPct val="100000"/>
               <a:buChar char="•"/>
               <a:lnSpc>
                 <a:spcPts val="2200"/>
@@ -25523,10 +25969,12 @@
           </a:bodyPr>
           <a:lstStyle/>
           <a:p>
-            <a:pPr>
+            <a:pPr lvl="0" marL="457200" indent="-228600">
+              <a:buFont typeface="Calibri"/>
               <a:spcAft>
                 <a:spcPts val="1000"/>
               </a:spcAft>
+              <a:buSzPct val="100000"/>
               <a:buChar char="•"/>
               <a:lnSpc>
                 <a:spcPts val="2200"/>
@@ -25543,10 +25991,12 @@
             </a:r>
           </a:p>
           <a:p>
-            <a:pPr>
+            <a:pPr lvl="0" marL="457200" indent="-228600">
+              <a:buFont typeface="Calibri"/>
               <a:spcAft>
                 <a:spcPts val="1000"/>
               </a:spcAft>
+              <a:buSzPct val="100000"/>
               <a:buChar char="•"/>
               <a:lnSpc>
                 <a:spcPts val="2200"/>
@@ -25563,10 +26013,12 @@
             </a:r>
           </a:p>
           <a:p>
-            <a:pPr>
+            <a:pPr lvl="0" marL="457200" indent="-228600">
+              <a:buFont typeface="Calibri"/>
               <a:spcAft>
                 <a:spcPts val="1000"/>
               </a:spcAft>
+              <a:buSzPct val="100000"/>
               <a:buChar char="•"/>
               <a:lnSpc>
                 <a:spcPts val="2200"/>
@@ -25583,10 +26035,12 @@
             </a:r>
           </a:p>
           <a:p>
-            <a:pPr>
+            <a:pPr lvl="0" marL="457200" indent="-228600">
+              <a:buFont typeface="Calibri"/>
               <a:spcAft>
                 <a:spcPts val="1000"/>
               </a:spcAft>
+              <a:buSzPct val="100000"/>
               <a:buChar char="•"/>
               <a:lnSpc>
                 <a:spcPts val="2200"/>
@@ -25722,10 +26176,12 @@
           </a:bodyPr>
           <a:lstStyle/>
           <a:p>
-            <a:pPr>
+            <a:pPr lvl="0" marL="457200" indent="-228600">
+              <a:buFont typeface="Calibri"/>
               <a:spcAft>
                 <a:spcPts val="1000"/>
               </a:spcAft>
+              <a:buSzPct val="100000"/>
               <a:buChar char="•"/>
               <a:lnSpc>
                 <a:spcPts val="2200"/>
@@ -25742,10 +26198,12 @@
             </a:r>
           </a:p>
           <a:p>
-            <a:pPr>
+            <a:pPr lvl="0" marL="457200" indent="-228600">
+              <a:buFont typeface="Calibri"/>
               <a:spcAft>
                 <a:spcPts val="1000"/>
               </a:spcAft>
+              <a:buSzPct val="100000"/>
               <a:buChar char="•"/>
               <a:lnSpc>
                 <a:spcPts val="2200"/>
@@ -25881,10 +26339,12 @@
           </a:bodyPr>
           <a:lstStyle/>
           <a:p>
-            <a:pPr>
+            <a:pPr lvl="0" marL="457200" indent="-228600">
+              <a:buFont typeface="Calibri"/>
               <a:spcAft>
                 <a:spcPts val="1000"/>
               </a:spcAft>
+              <a:buSzPct val="100000"/>
               <a:buChar char="•"/>
               <a:lnSpc>
                 <a:spcPts val="2200"/>
@@ -25901,10 +26361,12 @@
             </a:r>
           </a:p>
           <a:p>
-            <a:pPr>
+            <a:pPr lvl="0" marL="457200" indent="-228600">
+              <a:buFont typeface="Calibri"/>
               <a:spcAft>
                 <a:spcPts val="1000"/>
               </a:spcAft>
+              <a:buSzPct val="100000"/>
               <a:buChar char="•"/>
               <a:lnSpc>
                 <a:spcPts val="2200"/>
@@ -26040,10 +26502,12 @@
           </a:bodyPr>
           <a:lstStyle/>
           <a:p>
-            <a:pPr>
+            <a:pPr lvl="0" marL="457200" indent="-228600">
+              <a:buFont typeface="Calibri"/>
               <a:spcAft>
                 <a:spcPts val="1000"/>
               </a:spcAft>
+              <a:buSzPct val="100000"/>
               <a:buChar char="•"/>
               <a:lnSpc>
                 <a:spcPts val="2200"/>
@@ -26060,10 +26524,12 @@
             </a:r>
           </a:p>
           <a:p>
-            <a:pPr>
+            <a:pPr lvl="0" marL="457200" indent="-228600">
+              <a:buFont typeface="Calibri"/>
               <a:spcAft>
                 <a:spcPts val="1000"/>
               </a:spcAft>
+              <a:buSzPct val="100000"/>
               <a:buChar char="•"/>
               <a:lnSpc>
                 <a:spcPts val="2200"/>
@@ -26199,10 +26665,12 @@
           </a:bodyPr>
           <a:lstStyle/>
           <a:p>
-            <a:pPr>
+            <a:pPr lvl="0" marL="457200" indent="-228600">
+              <a:buFont typeface="Calibri"/>
               <a:spcAft>
                 <a:spcPts val="1000"/>
               </a:spcAft>
+              <a:buSzPct val="100000"/>
               <a:buChar char="•"/>
               <a:lnSpc>
                 <a:spcPts val="2200"/>
@@ -26219,10 +26687,12 @@
             </a:r>
           </a:p>
           <a:p>
-            <a:pPr>
+            <a:pPr lvl="0" marL="457200" indent="-228600">
+              <a:buFont typeface="Calibri"/>
               <a:spcAft>
                 <a:spcPts val="1000"/>
               </a:spcAft>
+              <a:buSzPct val="100000"/>
               <a:buChar char="•"/>
               <a:lnSpc>
                 <a:spcPts val="2200"/>
@@ -26358,10 +26828,12 @@
           </a:bodyPr>
           <a:lstStyle/>
           <a:p>
-            <a:pPr>
+            <a:pPr lvl="0" marL="457200" indent="-228600">
+              <a:buFont typeface="Calibri"/>
               <a:spcAft>
                 <a:spcPts val="1000"/>
               </a:spcAft>
+              <a:buSzPct val="100000"/>
               <a:buChar char="•"/>
               <a:lnSpc>
                 <a:spcPts val="2200"/>
@@ -26378,10 +26850,12 @@
             </a:r>
           </a:p>
           <a:p>
-            <a:pPr>
+            <a:pPr lvl="0" marL="457200" indent="-228600">
+              <a:buFont typeface="Calibri"/>
               <a:spcAft>
                 <a:spcPts val="1000"/>
               </a:spcAft>
+              <a:buSzPct val="100000"/>
               <a:buChar char="•"/>
               <a:lnSpc>
                 <a:spcPts val="2200"/>
@@ -26517,10 +26991,12 @@
           </a:bodyPr>
           <a:lstStyle/>
           <a:p>
-            <a:pPr>
+            <a:pPr lvl="0" marL="457200" indent="-228600">
+              <a:buFont typeface="Calibri"/>
               <a:spcAft>
                 <a:spcPts val="1000"/>
               </a:spcAft>
+              <a:buSzPct val="100000"/>
               <a:buChar char="•"/>
               <a:lnSpc>
                 <a:spcPts val="2200"/>
@@ -26537,10 +27013,12 @@
             </a:r>
           </a:p>
           <a:p>
-            <a:pPr>
+            <a:pPr lvl="0" marL="457200" indent="-228600">
+              <a:buFont typeface="Calibri"/>
               <a:spcAft>
                 <a:spcPts val="1000"/>
               </a:spcAft>
+              <a:buSzPct val="100000"/>
               <a:buChar char="•"/>
               <a:lnSpc>
                 <a:spcPts val="2200"/>
@@ -26557,10 +27035,12 @@
             </a:r>
           </a:p>
           <a:p>
-            <a:pPr>
+            <a:pPr lvl="0" marL="457200" indent="-228600">
+              <a:buFont typeface="Calibri"/>
               <a:spcAft>
                 <a:spcPts val="1000"/>
               </a:spcAft>
+              <a:buSzPct val="100000"/>
               <a:buChar char="•"/>
               <a:lnSpc>
                 <a:spcPts val="2200"/>
@@ -26696,10 +27176,12 @@
           </a:bodyPr>
           <a:lstStyle/>
           <a:p>
-            <a:pPr>
+            <a:pPr lvl="0" marL="457200" indent="-228600">
+              <a:buFont typeface="Calibri"/>
               <a:spcAft>
                 <a:spcPts val="1000"/>
               </a:spcAft>
+              <a:buSzPct val="100000"/>
               <a:buChar char="•"/>
               <a:lnSpc>
                 <a:spcPts val="2200"/>
@@ -26716,10 +27198,12 @@
             </a:r>
           </a:p>
           <a:p>
-            <a:pPr>
+            <a:pPr lvl="0" marL="457200" indent="-228600">
+              <a:buFont typeface="Calibri"/>
               <a:spcAft>
                 <a:spcPts val="1000"/>
               </a:spcAft>
+              <a:buSzPct val="100000"/>
               <a:buChar char="•"/>
               <a:lnSpc>
                 <a:spcPts val="2200"/>
@@ -26855,10 +27339,12 @@
           </a:bodyPr>
           <a:lstStyle/>
           <a:p>
-            <a:pPr>
+            <a:pPr lvl="0" marL="457200" indent="-228600">
+              <a:buFont typeface="Calibri"/>
               <a:spcAft>
                 <a:spcPts val="1000"/>
               </a:spcAft>
+              <a:buSzPct val="100000"/>
               <a:buChar char="•"/>
               <a:lnSpc>
                 <a:spcPts val="2200"/>
@@ -26875,10 +27361,12 @@
             </a:r>
           </a:p>
           <a:p>
-            <a:pPr>
+            <a:pPr lvl="0" marL="457200" indent="-228600">
+              <a:buFont typeface="Calibri"/>
               <a:spcAft>
                 <a:spcPts val="1000"/>
               </a:spcAft>
+              <a:buSzPct val="100000"/>
               <a:buChar char="•"/>
               <a:lnSpc>
                 <a:spcPts val="2200"/>
@@ -27014,10 +27502,12 @@
           </a:bodyPr>
           <a:lstStyle/>
           <a:p>
-            <a:pPr>
+            <a:pPr lvl="0" marL="457200" indent="-228600">
+              <a:buFont typeface="Calibri"/>
               <a:spcAft>
                 <a:spcPts val="1000"/>
               </a:spcAft>
+              <a:buSzPct val="100000"/>
               <a:buChar char="•"/>
               <a:lnSpc>
                 <a:spcPts val="2200"/>
@@ -27034,10 +27524,12 @@
             </a:r>
           </a:p>
           <a:p>
-            <a:pPr>
+            <a:pPr lvl="0" marL="457200" indent="-228600">
+              <a:buFont typeface="Calibri"/>
               <a:spcAft>
                 <a:spcPts val="1000"/>
               </a:spcAft>
+              <a:buSzPct val="100000"/>
               <a:buChar char="•"/>
               <a:lnSpc>
                 <a:spcPts val="2200"/>
@@ -27173,10 +27665,12 @@
           </a:bodyPr>
           <a:lstStyle/>
           <a:p>
-            <a:pPr>
+            <a:pPr lvl="0" marL="457200" indent="-228600">
+              <a:buFont typeface="Calibri"/>
               <a:spcAft>
                 <a:spcPts val="1000"/>
               </a:spcAft>
+              <a:buSzPct val="100000"/>
               <a:buChar char="•"/>
               <a:lnSpc>
                 <a:spcPts val="2200"/>
@@ -27193,10 +27687,12 @@
             </a:r>
           </a:p>
           <a:p>
-            <a:pPr>
+            <a:pPr lvl="0" marL="457200" indent="-228600">
+              <a:buFont typeface="Calibri"/>
               <a:spcAft>
                 <a:spcPts val="1000"/>
               </a:spcAft>
+              <a:buSzPct val="100000"/>
               <a:buChar char="•"/>
               <a:lnSpc>
                 <a:spcPts val="2200"/>
